--- a/files/04_3_생성형AI_이미지영상편.pptx
+++ b/files/04_3_생성형AI_이미지영상편.pptx
@@ -5,7 +5,7 @@
     <p:sldMasterId id="2147483648" r:id="rId1"/>
   </p:sldMasterIdLst>
   <p:notesMasterIdLst>
-    <p:notesMasterId r:id="rId27"/>
+    <p:notesMasterId r:id="rId29"/>
   </p:notesMasterIdLst>
   <p:sldIdLst>
     <p:sldId id="256" r:id="rId2"/>
@@ -16,25 +16,25 @@
     <p:sldId id="264" r:id="rId7"/>
     <p:sldId id="265" r:id="rId8"/>
     <p:sldId id="266" r:id="rId9"/>
-    <p:sldId id="267" r:id="rId10"/>
-    <p:sldId id="268" r:id="rId11"/>
-    <p:sldId id="269" r:id="rId12"/>
-    <p:sldId id="270" r:id="rId13"/>
-    <p:sldId id="273" r:id="rId14"/>
-    <p:sldId id="276" r:id="rId15"/>
+    <p:sldId id="267" r:id="rId11"/>
+    <p:sldId id="268" r:id="rId12"/>
+    <p:sldId id="269" r:id="rId13"/>
+    <p:sldId id="270" r:id="rId14"/>
+    <p:sldId id="273" r:id="rId15"/>
+    <p:sldId id="276" r:id="rId10"/>
     <p:sldId id="277" r:id="rId16"/>
-    <p:sldId id="297" r:id="rId32"/>
-    <p:sldId id="278" r:id="rId17"/>
-    <p:sldId id="279" r:id="rId18"/>
-    <p:sldId id="280" r:id="rId19"/>
-    <p:sldId id="281" r:id="rId20"/>
-    <p:sldId id="298" r:id="rId33"/>
-    <p:sldId id="291" r:id="rId21"/>
-    <p:sldId id="292" r:id="rId22"/>
-    <p:sldId id="293" r:id="rId23"/>
-    <p:sldId id="294" r:id="rId24"/>
-    <p:sldId id="295" r:id="rId25"/>
-    <p:sldId id="296" r:id="rId26"/>
+    <p:sldId id="297" r:id="rId17"/>
+    <p:sldId id="278" r:id="rId18"/>
+    <p:sldId id="279" r:id="rId19"/>
+    <p:sldId id="280" r:id="rId20"/>
+    <p:sldId id="281" r:id="rId21"/>
+    <p:sldId id="298" r:id="rId22"/>
+    <p:sldId id="291" r:id="rId23"/>
+    <p:sldId id="292" r:id="rId24"/>
+    <p:sldId id="293" r:id="rId25"/>
+    <p:sldId id="294" r:id="rId26"/>
+    <p:sldId id="295" r:id="rId27"/>
+    <p:sldId id="296" r:id="rId28"/>
   </p:sldIdLst>
   <p:sldSz cx="12192000" cy="6858000"/>
   <p:notesSz cx="6858000" cy="9144000"/>
@@ -133,7 +133,33 @@
       </a:defRPr>
     </a:lvl9pPr>
   </p:defaultTextStyle>
+  <p:extLst>
+    <p:ext uri="{EFAFB233-063F-42B5-8137-9DF3F51BA10A}">
+      <p15:sldGuideLst xmlns:p15="http://schemas.microsoft.com/office/powerpoint/2012/main"/>
+    </p:ext>
+  </p:extLst>
 </p:presentation>
+</file>
+
+<file path=ppt/changesInfos/changesInfo1.xml><?xml version="1.0" encoding="utf-8"?>
+<pc:chgInfo xmlns:a="http://schemas.openxmlformats.org/drawingml/2006/main" xmlns:r="http://schemas.openxmlformats.org/officeDocument/2006/relationships" xmlns:ac="http://schemas.microsoft.com/office/drawing/2013/main/command" xmlns:pc="http://schemas.microsoft.com/office/powerpoint/2013/main/command">
+  <pc:docChgLst>
+    <pc:chgData name="김상백" userId="b3a3fe65-020e-4fcc-8746-8ce33cba85ac" providerId="ADAL" clId="{FB5D924C-10CE-4134-9ECA-B22E8EC07F6B}"/>
+    <pc:docChg chg="modSld sldOrd">
+      <pc:chgData name="김상백" userId="b3a3fe65-020e-4fcc-8746-8ce33cba85ac" providerId="ADAL" clId="{FB5D924C-10CE-4134-9ECA-B22E8EC07F6B}" dt="2026-08-10T14:39:06.206" v="1"/>
+      <pc:docMkLst>
+        <pc:docMk/>
+      </pc:docMkLst>
+      <pc:sldChg chg="ord">
+        <pc:chgData name="김상백" userId="b3a3fe65-020e-4fcc-8746-8ce33cba85ac" providerId="ADAL" clId="{FB5D924C-10CE-4134-9ECA-B22E8EC07F6B}" dt="2026-08-10T14:39:06.206" v="1"/>
+        <pc:sldMkLst>
+          <pc:docMk/>
+          <pc:sldMk cId="1645198881" sldId="276"/>
+        </pc:sldMkLst>
+      </pc:sldChg>
+    </pc:docChg>
+  </pc:docChgLst>
+</pc:chgInfo>
 </file>
 
 <file path=ppt/notesMasters/notesMaster1.xml><?xml version="1.0" encoding="utf-8"?>
@@ -305,2878 +331,6 @@
     </a:lvl1pPr>
   </p:notesStyle>
 </p:notesMaster>
-</file>
-
-<file path=ppt/notesSlides/notesSlide1.xml><?xml version="1.0" encoding="utf-8"?>
-<p:notes xmlns:a="http://schemas.openxmlformats.org/drawingml/2006/main" xmlns:r="http://schemas.openxmlformats.org/officeDocument/2006/relationships" xmlns:p="http://schemas.openxmlformats.org/presentationml/2006/main">
-  <p:cSld>
-    <p:spTree>
-      <p:nvGrpSpPr>
-        <p:cNvPr id="1" name=""/>
-        <p:cNvGrpSpPr/>
-        <p:nvPr/>
-      </p:nvGrpSpPr>
-      <p:grpSpPr>
-        <a:xfrm>
-          <a:off x="0" y="0"/>
-          <a:ext cx="0" cy="0"/>
-          <a:chOff x="0" y="0"/>
-          <a:chExt cx="0" cy="0"/>
-        </a:xfrm>
-      </p:grpSpPr>
-      <p:sp>
-        <p:nvSpPr>
-          <p:cNvPr id="2" name="Slide Image Placeholder 1"/>
-          <p:cNvSpPr>
-            <a:spLocks noGrp="1" noRot="1" noChangeAspect="1"/>
-          </p:cNvSpPr>
-          <p:nvPr>
-            <p:ph type="sldImg"/>
-          </p:nvPr>
-        </p:nvSpPr>
-        <p:spPr/>
-      </p:sp>
-      <p:sp>
-        <p:nvSpPr>
-          <p:cNvPr id="3" name="Notes Placeholder 2"/>
-          <p:cNvSpPr>
-            <a:spLocks noGrp="1"/>
-          </p:cNvSpPr>
-          <p:nvPr>
-            <p:ph type="body" idx="1"/>
-          </p:nvPr>
-        </p:nvSpPr>
-        <p:spPr/>
-        <p:txBody>
-          <a:bodyPr/>
-          <a:lstStyle/>
-          <a:p>
-            <a:r>
-              <a:rPr dirty="0"/>
-              <a:t>3부입니다. </a:t>
-            </a:r>
-            <a:r>
-              <a:rPr dirty="0" err="1"/>
-              <a:t>이미지와</a:t>
-            </a:r>
-            <a:r>
-              <a:rPr dirty="0"/>
-              <a:t> </a:t>
-            </a:r>
-            <a:r>
-              <a:rPr dirty="0" err="1"/>
-              <a:t>영상을</a:t>
-            </a:r>
-            <a:r>
-              <a:rPr dirty="0"/>
-              <a:t> </a:t>
-            </a:r>
-            <a:r>
-              <a:rPr dirty="0" err="1"/>
-              <a:t>다룹니다</a:t>
-            </a:r>
-            <a:r>
-              <a:rPr dirty="0"/>
-              <a:t>.</a:t>
-            </a:r>
-          </a:p>
-          <a:p>
-            <a:r>
-              <a:rPr lang="ko-KR" altLang="en-US" dirty="0"/>
-              <a:t>사실 내용도 중요하지만 내용 못지않게 중요한 것이 </a:t>
-            </a:r>
-            <a:r>
-              <a:rPr lang="en-US" altLang="ko-KR" dirty="0"/>
-              <a:t>‘</a:t>
-            </a:r>
-            <a:r>
-              <a:rPr lang="ko-KR" altLang="en-US" dirty="0"/>
-              <a:t>디자인</a:t>
-            </a:r>
-            <a:r>
-              <a:rPr lang="en-US" altLang="ko-KR" dirty="0"/>
-              <a:t>’</a:t>
-            </a:r>
-            <a:r>
-              <a:rPr lang="ko-KR" altLang="en-US" dirty="0"/>
-              <a:t>입니다</a:t>
-            </a:r>
-            <a:r>
-              <a:rPr lang="en-US" altLang="ko-KR" dirty="0"/>
-              <a:t>.</a:t>
-            </a:r>
-          </a:p>
-          <a:p>
-            <a:r>
-              <a:rPr lang="ko-KR" altLang="en-US" dirty="0"/>
-              <a:t>보기 좋은 떡이 먹기도 좋다고</a:t>
-            </a:r>
-            <a:r>
-              <a:rPr lang="en-US" altLang="ko-KR" dirty="0"/>
-              <a:t>, </a:t>
-            </a:r>
-            <a:r>
-              <a:rPr lang="ko-KR" altLang="en-US" dirty="0"/>
-              <a:t>사업을 홍보하기 위해선 멋진 </a:t>
-            </a:r>
-            <a:r>
-              <a:rPr lang="en-US" altLang="ko-KR" dirty="0"/>
-              <a:t>‘</a:t>
-            </a:r>
-            <a:r>
-              <a:rPr lang="ko-KR" altLang="en-US" dirty="0"/>
-              <a:t>디자인</a:t>
-            </a:r>
-            <a:r>
-              <a:rPr lang="en-US" altLang="ko-KR" dirty="0"/>
-              <a:t>’</a:t>
-            </a:r>
-            <a:r>
-              <a:rPr lang="ko-KR" altLang="en-US" dirty="0"/>
-              <a:t>이 중요한 역할을 합니다</a:t>
-            </a:r>
-            <a:r>
-              <a:rPr lang="en-US" altLang="ko-KR" dirty="0"/>
-              <a:t>.</a:t>
-            </a:r>
-          </a:p>
-          <a:p>
-            <a:r>
-              <a:rPr lang="ko-KR" altLang="en-US" dirty="0"/>
-              <a:t>그리고 </a:t>
-            </a:r>
-            <a:r>
-              <a:rPr dirty="0" err="1"/>
-              <a:t>이미지</a:t>
-            </a:r>
-            <a:r>
-              <a:rPr dirty="0"/>
-              <a:t> 한 </a:t>
-            </a:r>
-            <a:r>
-              <a:rPr dirty="0" err="1"/>
-              <a:t>장은</a:t>
-            </a:r>
-            <a:r>
-              <a:rPr dirty="0"/>
-              <a:t> </a:t>
-            </a:r>
-            <a:r>
-              <a:rPr dirty="0" err="1"/>
-              <a:t>누구나</a:t>
-            </a:r>
-            <a:r>
-              <a:rPr dirty="0"/>
-              <a:t> </a:t>
-            </a:r>
-            <a:r>
-              <a:rPr dirty="0" err="1"/>
-              <a:t>만듭니다</a:t>
-            </a:r>
-            <a:r>
-              <a:rPr dirty="0"/>
-              <a:t>. </a:t>
-            </a:r>
-            <a:r>
-              <a:rPr dirty="0" err="1"/>
-              <a:t>어려운</a:t>
-            </a:r>
-            <a:r>
-              <a:rPr dirty="0"/>
-              <a:t> 건 </a:t>
-            </a:r>
-            <a:r>
-              <a:rPr dirty="0" err="1"/>
-              <a:t>여덟</a:t>
-            </a:r>
-            <a:r>
-              <a:rPr dirty="0"/>
-              <a:t> </a:t>
-            </a:r>
-            <a:r>
-              <a:rPr dirty="0" err="1"/>
-              <a:t>장을</a:t>
-            </a:r>
-            <a:r>
-              <a:rPr dirty="0"/>
-              <a:t> </a:t>
-            </a:r>
-            <a:r>
-              <a:rPr dirty="0" err="1"/>
-              <a:t>같은</a:t>
-            </a:r>
-            <a:r>
-              <a:rPr dirty="0"/>
-              <a:t> </a:t>
-            </a:r>
-            <a:r>
-              <a:rPr dirty="0" err="1"/>
-              <a:t>화풍으로</a:t>
-            </a:r>
-            <a:r>
-              <a:rPr dirty="0"/>
-              <a:t> </a:t>
-            </a:r>
-            <a:r>
-              <a:rPr dirty="0" err="1"/>
-              <a:t>만드는</a:t>
-            </a:r>
-            <a:r>
-              <a:rPr dirty="0"/>
-              <a:t> </a:t>
-            </a:r>
-            <a:r>
-              <a:rPr dirty="0" err="1"/>
-              <a:t>것입니다</a:t>
-            </a:r>
-            <a:r>
-              <a:rPr dirty="0"/>
-              <a:t>.</a:t>
-            </a:r>
-          </a:p>
-          <a:p>
-            <a:r>
-              <a:rPr dirty="0" err="1"/>
-              <a:t>카드뉴스</a:t>
-            </a:r>
-            <a:r>
-              <a:rPr dirty="0"/>
-              <a:t> 세 </a:t>
-            </a:r>
-            <a:r>
-              <a:rPr dirty="0" err="1"/>
-              <a:t>장을</a:t>
-            </a:r>
-            <a:r>
-              <a:rPr dirty="0"/>
-              <a:t> </a:t>
-            </a:r>
-            <a:r>
-              <a:rPr dirty="0" err="1"/>
-              <a:t>만들었는데</a:t>
-            </a:r>
-            <a:r>
-              <a:rPr dirty="0"/>
-              <a:t> </a:t>
-            </a:r>
-            <a:r>
-              <a:rPr dirty="0" err="1"/>
-              <a:t>그림체가</a:t>
-            </a:r>
-            <a:r>
-              <a:rPr dirty="0"/>
-              <a:t> 다 </a:t>
-            </a:r>
-            <a:r>
-              <a:rPr dirty="0" err="1"/>
-              <a:t>다르면</a:t>
-            </a:r>
-            <a:r>
-              <a:rPr dirty="0"/>
-              <a:t> 못 </a:t>
-            </a:r>
-            <a:r>
-              <a:rPr dirty="0" err="1"/>
-              <a:t>씁니다</a:t>
-            </a:r>
-            <a:r>
-              <a:rPr dirty="0"/>
-              <a:t>. </a:t>
-            </a:r>
-            <a:r>
-              <a:rPr dirty="0" err="1"/>
-              <a:t>홍보</a:t>
-            </a:r>
-            <a:r>
-              <a:rPr dirty="0"/>
-              <a:t> </a:t>
-            </a:r>
-            <a:r>
-              <a:rPr dirty="0" err="1"/>
-              <a:t>영상</a:t>
-            </a:r>
-            <a:r>
-              <a:rPr dirty="0"/>
-              <a:t> </a:t>
-            </a:r>
-            <a:r>
-              <a:rPr dirty="0" err="1"/>
-              <a:t>여덟</a:t>
-            </a:r>
-            <a:r>
-              <a:rPr dirty="0"/>
-              <a:t> </a:t>
-            </a:r>
-            <a:r>
-              <a:rPr dirty="0" err="1"/>
-              <a:t>컷의</a:t>
-            </a:r>
-            <a:r>
-              <a:rPr dirty="0"/>
-              <a:t> </a:t>
-            </a:r>
-            <a:r>
-              <a:rPr dirty="0" err="1"/>
-              <a:t>주인공</a:t>
-            </a:r>
-            <a:r>
-              <a:rPr dirty="0"/>
-              <a:t> </a:t>
-            </a:r>
-            <a:r>
-              <a:rPr dirty="0" err="1"/>
-              <a:t>얼굴이</a:t>
-            </a:r>
-            <a:r>
-              <a:rPr dirty="0"/>
-              <a:t> 매 컷 </a:t>
-            </a:r>
-            <a:r>
-              <a:rPr dirty="0" err="1"/>
-              <a:t>달라지면</a:t>
-            </a:r>
-            <a:r>
-              <a:rPr dirty="0"/>
-              <a:t> 못 </a:t>
-            </a:r>
-            <a:r>
-              <a:rPr dirty="0" err="1"/>
-              <a:t>씁니다</a:t>
-            </a:r>
-            <a:r>
-              <a:rPr dirty="0"/>
-              <a:t>.</a:t>
-            </a:r>
-          </a:p>
-          <a:p>
-            <a:r>
-              <a:rPr dirty="0" err="1"/>
-              <a:t>오늘</a:t>
-            </a:r>
-            <a:r>
-              <a:rPr dirty="0"/>
-              <a:t> </a:t>
-            </a:r>
-            <a:r>
-              <a:rPr dirty="0" err="1"/>
-              <a:t>배울</a:t>
-            </a:r>
-            <a:r>
-              <a:rPr dirty="0"/>
-              <a:t> </a:t>
-            </a:r>
-            <a:r>
-              <a:rPr dirty="0" err="1"/>
-              <a:t>것은</a:t>
-            </a:r>
-            <a:r>
-              <a:rPr dirty="0"/>
-              <a:t> </a:t>
-            </a:r>
-            <a:r>
-              <a:rPr lang="ko-KR" altLang="en-US" dirty="0"/>
-              <a:t>단순히 예쁜 그림 만드는 법이 아니라</a:t>
-            </a:r>
-            <a:r>
-              <a:rPr lang="en-US" altLang="ko-KR" dirty="0"/>
-              <a:t>’</a:t>
-            </a:r>
-            <a:r>
-              <a:rPr lang="ko-KR" altLang="en-US" dirty="0"/>
-              <a:t>내가 원하는</a:t>
-            </a:r>
-            <a:r>
-              <a:rPr lang="en-US" altLang="ko-KR" dirty="0"/>
-              <a:t>’ </a:t>
-            </a:r>
-            <a:r>
-              <a:rPr lang="ko-KR" altLang="en-US" dirty="0"/>
-              <a:t>이미지 그리고  </a:t>
-            </a:r>
-            <a:r>
-              <a:rPr dirty="0"/>
-              <a:t>'</a:t>
-            </a:r>
-            <a:r>
-              <a:rPr dirty="0" err="1"/>
-              <a:t>일관성을</a:t>
-            </a:r>
-            <a:r>
-              <a:rPr dirty="0"/>
-              <a:t> </a:t>
-            </a:r>
-            <a:r>
-              <a:rPr dirty="0" err="1"/>
-              <a:t>만드는</a:t>
-            </a:r>
-            <a:r>
-              <a:rPr dirty="0"/>
-              <a:t> </a:t>
-            </a:r>
-            <a:r>
-              <a:rPr dirty="0" err="1"/>
-              <a:t>규칙'입니다</a:t>
-            </a:r>
-            <a:r>
-              <a:rPr dirty="0"/>
-              <a:t>.</a:t>
-            </a:r>
-          </a:p>
-        </p:txBody>
-      </p:sp>
-      <p:sp>
-        <p:nvSpPr>
-          <p:cNvPr id="4" name="Slide Number Placeholder 3"/>
-          <p:cNvSpPr>
-            <a:spLocks noGrp="1"/>
-          </p:cNvSpPr>
-          <p:nvPr>
-            <p:ph type="sldNum" idx="5"/>
-          </p:nvPr>
-        </p:nvSpPr>
-        <p:spPr/>
-        <p:txBody>
-          <a:bodyPr/>
-          <a:lstStyle/>
-          <a:p>
-            <a:endParaRPr/>
-          </a:p>
-        </p:txBody>
-      </p:sp>
-    </p:spTree>
-  </p:cSld>
-  <p:clrMapOvr>
-    <a:masterClrMapping/>
-  </p:clrMapOvr>
-</p:notes>
-</file>
-
-<file path=ppt/notesSlides/notesSlide10.xml><?xml version="1.0" encoding="utf-8"?>
-<p:notes xmlns:a="http://schemas.openxmlformats.org/drawingml/2006/main" xmlns:r="http://schemas.openxmlformats.org/officeDocument/2006/relationships" xmlns:p="http://schemas.openxmlformats.org/presentationml/2006/main">
-  <p:cSld>
-    <p:spTree>
-      <p:nvGrpSpPr>
-        <p:cNvPr id="1" name=""/>
-        <p:cNvGrpSpPr/>
-        <p:nvPr/>
-      </p:nvGrpSpPr>
-      <p:grpSpPr>
-        <a:xfrm>
-          <a:off x="0" y="0"/>
-          <a:ext cx="0" cy="0"/>
-          <a:chOff x="0" y="0"/>
-          <a:chExt cx="0" cy="0"/>
-        </a:xfrm>
-      </p:grpSpPr>
-      <p:sp>
-        <p:nvSpPr>
-          <p:cNvPr id="2" name="Slide Image Placeholder 1"/>
-          <p:cNvSpPr>
-            <a:spLocks noGrp="1" noRot="1" noChangeAspect="1"/>
-          </p:cNvSpPr>
-          <p:nvPr>
-            <p:ph type="sldImg"/>
-          </p:nvPr>
-        </p:nvSpPr>
-        <p:spPr/>
-      </p:sp>
-      <p:sp>
-        <p:nvSpPr>
-          <p:cNvPr id="3" name="Notes Placeholder 2"/>
-          <p:cNvSpPr>
-            <a:spLocks noGrp="1"/>
-          </p:cNvSpPr>
-          <p:nvPr>
-            <p:ph type="body" idx="1"/>
-          </p:nvPr>
-        </p:nvSpPr>
-        <p:spPr/>
-        <p:txBody>
-          <a:bodyPr/>
-          <a:lstStyle/>
-          <a:p>
-            <a:r>
-              <a:t>캐릭터 일관성 다섯 원칙입니다. 순서대로 지키면 됩니다.</a:t>
-            </a:r>
-          </a:p>
-          <a:p>
-            <a:r>
-              <a:t>①번이 의외로 결정적입니다. "그 아이", "주인공"이라고 쓰면 매번 다른 사람이 나옵니다. 고유한 이름을 붙이는 순간 모델이 그 이름과 외형을 연결합니다.</a:t>
-            </a:r>
-          </a:p>
-          <a:p>
-            <a:r>
-              <a:t>④번을 설명드리겠습니다. 지금 만드는 한 장면을 고치는 동안은 같은 대화에서 "여기서 이것만 바꿔 줘"로 이어 갑니다. 그런데 다음 장면으로 넘어갈 때는 캐릭터 시트를 다시 첨부하고 시작하십시오.</a:t>
-            </a:r>
-          </a:p>
-          <a:p>
-            <a:r>
-              <a:t>왜냐하면 일관성은 대화가 기억해 주는 게 아니라 기준 그림이 지키는 것이기 때문입니다. 대화가 길어질수록 얼굴이 조금씩 흘러갑니다. 이걸 드리프트라고 합니다.</a:t>
-            </a:r>
-          </a:p>
-          <a:p>
-            <a:r>
-              <a:t>⑤번은 다음 장에서 자세히 다루겠습니다.</a:t>
-            </a:r>
-          </a:p>
-          <a:p>
-            <a:endParaRPr/>
-          </a:p>
-          <a:p>
-            <a:r>
-              <a:t>[참고]</a:t>
-            </a:r>
-          </a:p>
-          <a:p>
-            <a:r>
-              <a:t>- https://cloud.google.com/blog/products/ai-machine-learning/ultimate-prompting-guide-for-nano-banana</a:t>
-            </a:r>
-          </a:p>
-        </p:txBody>
-      </p:sp>
-      <p:sp>
-        <p:nvSpPr>
-          <p:cNvPr id="4" name="Slide Number Placeholder 3"/>
-          <p:cNvSpPr>
-            <a:spLocks noGrp="1"/>
-          </p:cNvSpPr>
-          <p:nvPr>
-            <p:ph type="sldNum" idx="5"/>
-          </p:nvPr>
-        </p:nvSpPr>
-        <p:spPr/>
-        <p:txBody>
-          <a:bodyPr/>
-          <a:lstStyle/>
-          <a:p>
-            <a:endParaRPr/>
-          </a:p>
-        </p:txBody>
-      </p:sp>
-    </p:spTree>
-  </p:cSld>
-  <p:clrMapOvr>
-    <a:masterClrMapping/>
-  </p:clrMapOvr>
-</p:notes>
-</file>
-
-<file path=ppt/notesSlides/notesSlide11.xml><?xml version="1.0" encoding="utf-8"?>
-<p:notes xmlns:a="http://schemas.openxmlformats.org/drawingml/2006/main" xmlns:r="http://schemas.openxmlformats.org/officeDocument/2006/relationships" xmlns:p="http://schemas.openxmlformats.org/presentationml/2006/main">
-  <p:cSld>
-    <p:spTree>
-      <p:nvGrpSpPr>
-        <p:cNvPr id="1" name=""/>
-        <p:cNvGrpSpPr/>
-        <p:nvPr/>
-      </p:nvGrpSpPr>
-      <p:grpSpPr>
-        <a:xfrm>
-          <a:off x="0" y="0"/>
-          <a:ext cx="0" cy="0"/>
-          <a:chOff x="0" y="0"/>
-          <a:chExt cx="0" cy="0"/>
-        </a:xfrm>
-      </p:grpSpPr>
-      <p:sp>
-        <p:nvSpPr>
-          <p:cNvPr id="2" name="Slide Image Placeholder 1"/>
-          <p:cNvSpPr>
-            <a:spLocks noGrp="1" noRot="1" noChangeAspect="1"/>
-          </p:cNvSpPr>
-          <p:nvPr>
-            <p:ph type="sldImg"/>
-          </p:nvPr>
-        </p:nvSpPr>
-        <p:spPr/>
-      </p:sp>
-      <p:sp>
-        <p:nvSpPr>
-          <p:cNvPr id="3" name="Notes Placeholder 2"/>
-          <p:cNvSpPr>
-            <a:spLocks noGrp="1"/>
-          </p:cNvSpPr>
-          <p:nvPr>
-            <p:ph type="body" idx="1"/>
-          </p:nvPr>
-        </p:nvSpPr>
-        <p:spPr/>
-        <p:txBody>
-          <a:bodyPr/>
-          <a:lstStyle/>
-          <a:p>
-            <a:r>
-              <a:t>기준 이미지는 아무 그림이나 되는 게 아닙니다. 네 조건을 지켜야 뒤에서 쓸 수 있습니다.</a:t>
-            </a:r>
-          </a:p>
-          <a:p>
-            <a:r>
-              <a:t>전신, 정면, 단색 배경, 중립 표정. 이 넷입니다.</a:t>
-            </a:r>
-          </a:p>
-          <a:p>
-            <a:r>
-              <a:t>왜 중립 표정이냐면 — 웃는 얼굴을 기준으로 삼으면 슬픈 장면에서도 자꾸 웃습니다. 중립에서 출발해야 감정 변형이 쉽습니다.</a:t>
-            </a:r>
-          </a:p>
-          <a:p>
-            <a:r>
-              <a:t>왜 단색 배경이냐면 — 배경이 복잡하면 모델이 인물과 배경을 헷갈립니다. 실루엣이 또렷해야 합니다.</a:t>
-            </a:r>
-          </a:p>
-          <a:p>
-            <a:r>
-              <a:t>※ 기준 이미지는 두 장입니다. 스타일 기준(화풍) 한 장, 캐릭터 기준(인물) 한 장. 둘을 나눠서 만드십시오.</a:t>
-            </a:r>
-          </a:p>
-        </p:txBody>
-      </p:sp>
-      <p:sp>
-        <p:nvSpPr>
-          <p:cNvPr id="4" name="Slide Number Placeholder 3"/>
-          <p:cNvSpPr>
-            <a:spLocks noGrp="1"/>
-          </p:cNvSpPr>
-          <p:nvPr>
-            <p:ph type="sldNum" idx="5"/>
-          </p:nvPr>
-        </p:nvSpPr>
-        <p:spPr/>
-        <p:txBody>
-          <a:bodyPr/>
-          <a:lstStyle/>
-          <a:p>
-            <a:endParaRPr/>
-          </a:p>
-        </p:txBody>
-      </p:sp>
-    </p:spTree>
-  </p:cSld>
-  <p:clrMapOvr>
-    <a:masterClrMapping/>
-  </p:clrMapOvr>
-</p:notes>
-</file>
-
-<file path=ppt/notesSlides/notesSlide12.xml><?xml version="1.0" encoding="utf-8"?>
-<p:notes xmlns:a="http://schemas.openxmlformats.org/drawingml/2006/main" xmlns:r="http://schemas.openxmlformats.org/officeDocument/2006/relationships" xmlns:p="http://schemas.openxmlformats.org/presentationml/2006/main">
-  <p:cSld>
-    <p:spTree>
-      <p:nvGrpSpPr>
-        <p:cNvPr id="1" name=""/>
-        <p:cNvGrpSpPr/>
-        <p:nvPr/>
-      </p:nvGrpSpPr>
-      <p:grpSpPr>
-        <a:xfrm>
-          <a:off x="0" y="0"/>
-          <a:ext cx="0" cy="0"/>
-          <a:chOff x="0" y="0"/>
-          <a:chExt cx="0" cy="0"/>
-        </a:xfrm>
-      </p:grpSpPr>
-      <p:sp>
-        <p:nvSpPr>
-          <p:cNvPr id="2" name="Slide Image Placeholder 1"/>
-          <p:cNvSpPr>
-            <a:spLocks noGrp="1" noRot="1" noChangeAspect="1"/>
-          </p:cNvSpPr>
-          <p:nvPr>
-            <p:ph type="sldImg"/>
-          </p:nvPr>
-        </p:nvSpPr>
-        <p:spPr/>
-      </p:sp>
-      <p:sp>
-        <p:nvSpPr>
-          <p:cNvPr id="3" name="Notes Placeholder 2"/>
-          <p:cNvSpPr>
-            <a:spLocks noGrp="1"/>
-          </p:cNvSpPr>
-          <p:nvPr>
-            <p:ph type="body" idx="1"/>
-          </p:nvPr>
-        </p:nvSpPr>
-        <p:spPr/>
-        <p:txBody>
-          <a:bodyPr/>
-          <a:lstStyle/>
-          <a:p>
-            <a:r>
-              <a:t>기준 이미지를 만드는 가장 빠른 방법입니다. 탐색 → 선택 → 확정 3단계입니다.</a:t>
-            </a:r>
-          </a:p>
-          <a:p>
-            <a:r>
-              <a:t>1단계에서 후보 6개를 한 화면에 뽑습니다. 하나씩 만들어 보면 시간이 몇 배 걸립니다. 그리드로 뽑으면 한 번에 비교됩니다.</a:t>
-            </a:r>
-          </a:p>
-          <a:p>
-            <a:r>
-              <a:t>2단계는 선택 사항입니다. 6개 중 하나가 거의 마음에 드는데 세부만 아쉬울 때 씁니다.</a:t>
-            </a:r>
-          </a:p>
-          <a:p>
-            <a:r>
-              <a:t>3단계가 중요합니다. 그리드에서 잘라낸 이미지에는 번호가 남아 있습니다. 그 상태로 참조에 쓰면 번호까지 따라 그립니다. 반드시 번호 없는 단일 이미지로 다시 뽑으십시오.</a:t>
-            </a:r>
-          </a:p>
-          <a:p>
-            <a:r>
-              <a:t>확정한 파일은 `캐릭터기준_이름.png` 처럼 이름을 붙여 저장해 두십시오. 이후 모든 컷에서 이 파일을 첨부합니다.</a:t>
-            </a:r>
-          </a:p>
-          <a:p>
-            <a:r>
-              <a:t>※ 이미 마음에 드는 인물이 그려진 컷이 있다면 — 그 이미지를 첨부하고 "이 인물을 기준 이미지 형태로 다시 그려 줘"라고만 하면 됩니다. 훨씬 빠릅니다.</a:t>
-            </a:r>
-          </a:p>
-        </p:txBody>
-      </p:sp>
-      <p:sp>
-        <p:nvSpPr>
-          <p:cNvPr id="4" name="Slide Number Placeholder 3"/>
-          <p:cNvSpPr>
-            <a:spLocks noGrp="1"/>
-          </p:cNvSpPr>
-          <p:nvPr>
-            <p:ph type="sldNum" idx="5"/>
-          </p:nvPr>
-        </p:nvSpPr>
-        <p:spPr/>
-        <p:txBody>
-          <a:bodyPr/>
-          <a:lstStyle/>
-          <a:p>
-            <a:endParaRPr/>
-          </a:p>
-        </p:txBody>
-      </p:sp>
-    </p:spTree>
-  </p:cSld>
-  <p:clrMapOvr>
-    <a:masterClrMapping/>
-  </p:clrMapOvr>
-</p:notes>
-</file>
-
-<file path=ppt/notesSlides/notesSlide13.xml><?xml version="1.0" encoding="utf-8"?>
-<p:notes xmlns:a="http://schemas.openxmlformats.org/drawingml/2006/main" xmlns:r="http://schemas.openxmlformats.org/officeDocument/2006/relationships" xmlns:p="http://schemas.openxmlformats.org/presentationml/2006/main">
-  <p:cSld>
-    <p:spTree>
-      <p:nvGrpSpPr>
-        <p:cNvPr id="1" name=""/>
-        <p:cNvGrpSpPr/>
-        <p:nvPr/>
-      </p:nvGrpSpPr>
-      <p:grpSpPr>
-        <a:xfrm>
-          <a:off x="0" y="0"/>
-          <a:ext cx="0" cy="0"/>
-          <a:chOff x="0" y="0"/>
-          <a:chExt cx="0" cy="0"/>
-        </a:xfrm>
-      </p:grpSpPr>
-      <p:sp>
-        <p:nvSpPr>
-          <p:cNvPr id="2" name="Slide Image Placeholder 1"/>
-          <p:cNvSpPr>
-            <a:spLocks noGrp="1" noRot="1" noChangeAspect="1"/>
-          </p:cNvSpPr>
-          <p:nvPr>
-            <p:ph type="sldImg"/>
-          </p:nvPr>
-        </p:nvSpPr>
-        <p:spPr/>
-      </p:sp>
-      <p:sp>
-        <p:nvSpPr>
-          <p:cNvPr id="3" name="Notes Placeholder 2"/>
-          <p:cNvSpPr>
-            <a:spLocks noGrp="1"/>
-          </p:cNvSpPr>
-          <p:nvPr>
-            <p:ph type="body" idx="1"/>
-          </p:nvPr>
-        </p:nvSpPr>
-        <p:spPr/>
-        <p:txBody>
-          <a:bodyPr/>
-          <a:lstStyle/>
-          <a:p>
-            <a:r>
-              <a:t>참조 이미지를 여러 장 넣을 때는 반드시 라벨을 붙이십시오. 안 그러면 섞입니다.</a:t>
-            </a:r>
-          </a:p>
-          <a:p>
-            <a:r>
-              <a:t>패턴 A는 역할로 부르는 방식입니다. "첫 번째 이미지는 인물 기준이야"라고 선언하고, 아래에서 그 이름으로 부릅니다.</a:t>
-            </a:r>
-          </a:p>
-          <a:p>
-            <a:r>
-              <a:t>패턴 B는 고유명사를 씁니다. 여러 컷을 만들 때 이쪽이 훨씬 편합니다. 컷 블록만 갈아끼우면 되니까요.</a:t>
-            </a:r>
-          </a:p>
-          <a:p>
-            <a:r>
-              <a:t>라벨 없이 그냥 이미지 세 장을 넣고 "이렇게 만들어 줘"라고 하면, 모델이 어느 이미지에서 무엇을 가져올지 스스로 정합니다. 결과가 복불복이 됩니다.</a:t>
-            </a:r>
-          </a:p>
-          <a:p>
-            <a:r>
-              <a:t>※ 예시의 이름은 예시일 뿐입니다. 각자 사업·인물로 바꿔 쓰십시오.</a:t>
-            </a:r>
-          </a:p>
-        </p:txBody>
-      </p:sp>
-      <p:sp>
-        <p:nvSpPr>
-          <p:cNvPr id="4" name="Slide Number Placeholder 3"/>
-          <p:cNvSpPr>
-            <a:spLocks noGrp="1"/>
-          </p:cNvSpPr>
-          <p:nvPr>
-            <p:ph type="sldNum" idx="5"/>
-          </p:nvPr>
-        </p:nvSpPr>
-        <p:spPr/>
-        <p:txBody>
-          <a:bodyPr/>
-          <a:lstStyle/>
-          <a:p>
-            <a:endParaRPr/>
-          </a:p>
-        </p:txBody>
-      </p:sp>
-    </p:spTree>
-  </p:cSld>
-  <p:clrMapOvr>
-    <a:masterClrMapping/>
-  </p:clrMapOvr>
-</p:notes>
-</file>
-
-<file path=ppt/notesSlides/notesSlide14.xml><?xml version="1.0" encoding="utf-8"?>
-<p:notes xmlns:a="http://schemas.openxmlformats.org/drawingml/2006/main" xmlns:r="http://schemas.openxmlformats.org/officeDocument/2006/relationships" xmlns:p="http://schemas.openxmlformats.org/presentationml/2006/main">
-  <p:cSld>
-    <p:spTree>
-      <p:nvGrpSpPr>
-        <p:cNvPr id="1" name=""/>
-        <p:cNvGrpSpPr/>
-        <p:nvPr/>
-      </p:nvGrpSpPr>
-      <p:grpSpPr>
-        <a:xfrm>
-          <a:off x="0" y="0"/>
-          <a:ext cx="0" cy="0"/>
-          <a:chOff x="0" y="0"/>
-          <a:chExt cx="0" cy="0"/>
-        </a:xfrm>
-      </p:grpSpPr>
-      <p:sp>
-        <p:nvSpPr>
-          <p:cNvPr id="2" name="Slide Image Placeholder 1"/>
-          <p:cNvSpPr>
-            <a:spLocks noGrp="1" noRot="1" noChangeAspect="1"/>
-          </p:cNvSpPr>
-          <p:nvPr>
-            <p:ph type="sldImg"/>
-          </p:nvPr>
-        </p:nvSpPr>
-        <p:spPr/>
-      </p:sp>
-      <p:sp>
-        <p:nvSpPr>
-          <p:cNvPr id="3" name="Notes Placeholder 2"/>
-          <p:cNvSpPr>
-            <a:spLocks noGrp="1"/>
-          </p:cNvSpPr>
-          <p:nvPr>
-            <p:ph type="body" idx="1"/>
-          </p:nvPr>
-        </p:nvSpPr>
-        <p:spPr/>
-        <p:txBody>
-          <a:bodyPr/>
-          <a:lstStyle/>
-          <a:p>
-            <a:r>
-              <a:t>실습 8-A입니다. 30분 드립니다.</a:t>
-            </a:r>
-          </a:p>
-          <a:p>
-            <a:r>
-              <a:t>2번을 반드시 먼저 하십시오. 스타일 블록 없이 만들기 시작하면 3장이 다 다른 그림이 됩니다. 이게 오늘 실습의 성패를 가릅니다.</a:t>
-            </a:r>
-          </a:p>
-          <a:p>
-            <a:r>
-              <a:t>5번 — 글자가 깨지면 두 가지 길이 있다고 했습니다. 시간이 없으면 그냥 글자 없이 만들고 넘어가십시오. 파워포인트에서 얹으면 됩니다.</a:t>
-            </a:r>
-          </a:p>
-          <a:p>
-            <a:r>
-              <a:t>6번이 검수입니다. 세 장을 나란히 놓고 보십시오. 화풍이 다르면 스타일 블록이 제대로 안 붙은 겁니다.</a:t>
-            </a:r>
-          </a:p>
-          <a:p>
-            <a:r>
-              <a:t>※ 순회 포인트 — ① 스타일 블록을 안 만든 분 ② 매번 다른 말로 스타일을 설명하는 분 ③ 글자 깨짐에 30분을 쓰는 분. 이 셋입니다.</a:t>
-            </a:r>
-          </a:p>
-          <a:p>
-            <a:r>
-              <a:t>[▶ 웹가이드] 실습 시작 전에 「실습 9개」의 실습 8 칸을 띄워 목표·순서를 확인시키고, 완성본은 게시판에 '실습 8-A'로 올리게 합니다. 게시판에 올라오는 카드뉴스를 중간중간 화면에 띄우면 분위기가 올라갑니다.</a:t>
-            </a:r>
-          </a:p>
-        </p:txBody>
-      </p:sp>
-      <p:sp>
-        <p:nvSpPr>
-          <p:cNvPr id="4" name="Slide Number Placeholder 3"/>
-          <p:cNvSpPr>
-            <a:spLocks noGrp="1"/>
-          </p:cNvSpPr>
-          <p:nvPr>
-            <p:ph type="sldNum" idx="5"/>
-          </p:nvPr>
-        </p:nvSpPr>
-        <p:spPr/>
-        <p:txBody>
-          <a:bodyPr/>
-          <a:lstStyle/>
-          <a:p>
-            <a:endParaRPr/>
-          </a:p>
-        </p:txBody>
-      </p:sp>
-    </p:spTree>
-  </p:cSld>
-  <p:clrMapOvr>
-    <a:masterClrMapping/>
-  </p:clrMapOvr>
-</p:notes>
-</file>
-
-<file path=ppt/notesSlides/notesSlide15.xml><?xml version="1.0" encoding="utf-8"?>
-<p:notes xmlns:a="http://schemas.openxmlformats.org/drawingml/2006/main" xmlns:r="http://schemas.openxmlformats.org/officeDocument/2006/relationships" xmlns:p="http://schemas.openxmlformats.org/presentationml/2006/main">
-  <p:cSld>
-    <p:spTree>
-      <p:nvGrpSpPr>
-        <p:cNvPr id="1" name=""/>
-        <p:cNvGrpSpPr/>
-        <p:nvPr/>
-      </p:nvGrpSpPr>
-      <p:grpSpPr>
-        <a:xfrm>
-          <a:off x="0" y="0"/>
-          <a:ext cx="0" cy="0"/>
-          <a:chOff x="0" y="0"/>
-          <a:chExt cx="0" cy="0"/>
-        </a:xfrm>
-      </p:grpSpPr>
-      <p:sp>
-        <p:nvSpPr>
-          <p:cNvPr id="2" name="Slide Image Placeholder 1"/>
-          <p:cNvSpPr>
-            <a:spLocks noGrp="1" noRot="1" noChangeAspect="1"/>
-          </p:cNvSpPr>
-          <p:nvPr>
-            <p:ph type="sldImg"/>
-          </p:nvPr>
-        </p:nvSpPr>
-        <p:spPr/>
-      </p:sp>
-      <p:sp>
-        <p:nvSpPr>
-          <p:cNvPr id="3" name="Notes Placeholder 2"/>
-          <p:cNvSpPr>
-            <a:spLocks noGrp="1"/>
-          </p:cNvSpPr>
-          <p:nvPr>
-            <p:ph type="body" idx="1"/>
-          </p:nvPr>
-        </p:nvSpPr>
-        <p:spPr/>
-        <p:txBody>
-          <a:bodyPr/>
-          <a:lstStyle/>
-          <a:p>
-            <a:r>
-              <a:t>이제 영상입니다. 오늘 쓸 방식은 하나입니다 — 만들어 둔 이미지를 첫 프레임으로 넣고 움직임만 지시하기.</a:t>
-            </a:r>
-          </a:p>
-          <a:p>
-            <a:r>
-              <a:t>백지에서 영상을 만드는 것보다 훨씬 안정적이고, 앞에서 만든 일관성이 그대로 이어집니다.</a:t>
-            </a:r>
-          </a:p>
-        </p:txBody>
-      </p:sp>
-      <p:sp>
-        <p:nvSpPr>
-          <p:cNvPr id="4" name="Slide Number Placeholder 3"/>
-          <p:cNvSpPr>
-            <a:spLocks noGrp="1"/>
-          </p:cNvSpPr>
-          <p:nvPr>
-            <p:ph type="sldNum" idx="5"/>
-          </p:nvPr>
-        </p:nvSpPr>
-        <p:spPr/>
-        <p:txBody>
-          <a:bodyPr/>
-          <a:lstStyle/>
-          <a:p>
-            <a:endParaRPr/>
-          </a:p>
-        </p:txBody>
-      </p:sp>
-    </p:spTree>
-  </p:cSld>
-  <p:clrMapOvr>
-    <a:masterClrMapping/>
-  </p:clrMapOvr>
-</p:notes>
-</file>
-
-<file path=ppt/notesSlides/notesSlide16.xml><?xml version="1.0" encoding="utf-8"?>
-<p:notes xmlns:a="http://schemas.openxmlformats.org/drawingml/2006/main" xmlns:r="http://schemas.openxmlformats.org/officeDocument/2006/relationships" xmlns:p="http://schemas.openxmlformats.org/presentationml/2006/main">
-  <p:cSld>
-    <p:spTree>
-      <p:nvGrpSpPr>
-        <p:cNvPr id="1" name=""/>
-        <p:cNvGrpSpPr/>
-        <p:nvPr/>
-      </p:nvGrpSpPr>
-      <p:grpSpPr>
-        <a:xfrm>
-          <a:off x="0" y="0"/>
-          <a:ext cx="0" cy="0"/>
-          <a:chOff x="0" y="0"/>
-          <a:chExt cx="0" cy="0"/>
-        </a:xfrm>
-      </p:grpSpPr>
-      <p:sp>
-        <p:nvSpPr>
-          <p:cNvPr id="2" name="Slide Image Placeholder 1"/>
-          <p:cNvSpPr>
-            <a:spLocks noGrp="1" noRot="1" noChangeAspect="1"/>
-          </p:cNvSpPr>
-          <p:nvPr>
-            <p:ph type="sldImg"/>
-          </p:nvPr>
-        </p:nvSpPr>
-        <p:spPr/>
-      </p:sp>
-      <p:sp>
-        <p:nvSpPr>
-          <p:cNvPr id="3" name="Notes Placeholder 2"/>
-          <p:cNvSpPr>
-            <a:spLocks noGrp="1"/>
-          </p:cNvSpPr>
-          <p:nvPr>
-            <p:ph type="body" idx="1"/>
-          </p:nvPr>
-        </p:nvSpPr>
-        <p:spPr/>
-        <p:txBody>
-          <a:bodyPr/>
-          <a:lstStyle/>
-          <a:p>
-            <a:r>
-              <a:t>도구가 여러 개라 헷갈리실 텐데, 오늘 쓸 것은 셋째 줄 하나입니다.</a:t>
-            </a:r>
-          </a:p>
-          <a:p>
-            <a:r>
-              <a:t>Frames to Video — 만들어 둔 이미지를 시작 프레임으로 지정해서 영상을 만드는 기능입니다.</a:t>
-            </a:r>
-          </a:p>
-          <a:p>
-            <a:r>
-              <a:t>넷째 줄 에이전트는 최근에 좋아진 부분입니다. 예전에는 컷마다 기준 이미지를 다시 첨부해야 했는데, 이제 프로젝트에 한 번만 등록해 두면 됩니다. 뒤에서 설명드립니다.</a:t>
-            </a:r>
-          </a:p>
-          <a:p>
-            <a:r>
-              <a:t>⚠ 중요한 제약 하나 — Google Flow는 만 18세 이상만 쓸 수 있습니다. 학생과 함께 쓰는 상황이면 그대로 제약이 됩니다.</a:t>
-            </a:r>
-          </a:p>
-          <a:p>
-            <a:r>
-              <a:t>⚠ 그리고 자막·타이틀은 영상 생성 단계에서 넣지 마십시오. 편집기에서 얹는 게 정석입니다.</a:t>
-            </a:r>
-          </a:p>
-          <a:p>
-            <a:endParaRPr/>
-          </a:p>
-          <a:p>
-            <a:r>
-              <a:t>[참고]</a:t>
-            </a:r>
-          </a:p>
-          <a:p>
-            <a:r>
-              <a:t>- https://support.google.com/flow/answer/16352836</a:t>
-            </a:r>
-          </a:p>
-        </p:txBody>
-      </p:sp>
-      <p:sp>
-        <p:nvSpPr>
-          <p:cNvPr id="4" name="Slide Number Placeholder 3"/>
-          <p:cNvSpPr>
-            <a:spLocks noGrp="1"/>
-          </p:cNvSpPr>
-          <p:nvPr>
-            <p:ph type="sldNum" idx="5"/>
-          </p:nvPr>
-        </p:nvSpPr>
-        <p:spPr/>
-        <p:txBody>
-          <a:bodyPr/>
-          <a:lstStyle/>
-          <a:p>
-            <a:endParaRPr/>
-          </a:p>
-        </p:txBody>
-      </p:sp>
-    </p:spTree>
-  </p:cSld>
-  <p:clrMapOvr>
-    <a:masterClrMapping/>
-  </p:clrMapOvr>
-</p:notes>
-</file>
-
-<file path=ppt/notesSlides/notesSlide17.xml><?xml version="1.0" encoding="utf-8"?>
-<p:notes xmlns:a="http://schemas.openxmlformats.org/drawingml/2006/main" xmlns:r="http://schemas.openxmlformats.org/officeDocument/2006/relationships" xmlns:p="http://schemas.openxmlformats.org/presentationml/2006/main">
-  <p:cSld>
-    <p:spTree>
-      <p:nvGrpSpPr>
-        <p:cNvPr id="1" name=""/>
-        <p:cNvGrpSpPr/>
-        <p:nvPr/>
-      </p:nvGrpSpPr>
-      <p:grpSpPr>
-        <a:xfrm>
-          <a:off x="0" y="0"/>
-          <a:ext cx="0" cy="0"/>
-          <a:chOff x="0" y="0"/>
-          <a:chExt cx="0" cy="0"/>
-        </a:xfrm>
-      </p:grpSpPr>
-      <p:sp>
-        <p:nvSpPr>
-          <p:cNvPr id="2" name="Slide Image Placeholder 1"/>
-          <p:cNvSpPr>
-            <a:spLocks noGrp="1" noRot="1" noChangeAspect="1"/>
-          </p:cNvSpPr>
-          <p:nvPr>
-            <p:ph type="sldImg"/>
-          </p:nvPr>
-        </p:nvSpPr>
-        <p:spPr/>
-      </p:sp>
-      <p:sp>
-        <p:nvSpPr>
-          <p:cNvPr id="3" name="Notes Placeholder 2"/>
-          <p:cNvSpPr>
-            <a:spLocks noGrp="1"/>
-          </p:cNvSpPr>
-          <p:nvPr>
-            <p:ph type="body" idx="1"/>
-          </p:nvPr>
-        </p:nvSpPr>
-        <p:spPr/>
-        <p:txBody>
-          <a:bodyPr/>
-          <a:lstStyle/>
-          <a:p>
-            <a:r>
-              <a:t>구글 공식 문서가 밝힌 네 가지 원칙입니다.</a:t>
-            </a:r>
-          </a:p>
-          <a:p>
-            <a:r>
-              <a:t>②번이 초보자가 제일 많이 틀리는 대목입니다. 공식 문서 원문을 그대로 옮기면 — "소스 이미지가 이미 주체·장면·스타일을 제공한다. 프롬프트는 원하는 움직임에 집중하라. 이미지에 있는 것을 다시 서술하면 모델이 혼란스러워지고 결과가 나빠진다."</a:t>
-            </a:r>
-          </a:p>
-          <a:p>
-            <a:r>
-              <a:t>즉, "쪽빛 한복을 입은 아이가 강가에 서 있다. 따뜻한 황금빛 조명"이라고 쓰면 안 됩니다. 그건 이미 이미지에 있습니다.</a:t>
-            </a:r>
-          </a:p>
-          <a:p>
-            <a:r>
-              <a:t>대신 "인물이 천천히 팔을 들어 지평선을 가리킨다. 카메라가 천천히 다가간다"라고 쓰십시오.</a:t>
-            </a:r>
-          </a:p>
-          <a:p>
-            <a:r>
-              <a:t>③번의 '두 개까지만'이 실전 기준입니다. 셋 다 넣으면 실패율이 급증합니다.</a:t>
-            </a:r>
-          </a:p>
-          <a:p>
-            <a:endParaRPr/>
-          </a:p>
-          <a:p>
-            <a:r>
-              <a:t>[참고]</a:t>
-            </a:r>
-          </a:p>
-          <a:p>
-            <a:r>
-              <a:t>- https://docs.cloud.google.com/vertex-ai/generative-ai/docs/video/best-practice</a:t>
-            </a:r>
-          </a:p>
-        </p:txBody>
-      </p:sp>
-      <p:sp>
-        <p:nvSpPr>
-          <p:cNvPr id="4" name="Slide Number Placeholder 3"/>
-          <p:cNvSpPr>
-            <a:spLocks noGrp="1"/>
-          </p:cNvSpPr>
-          <p:nvPr>
-            <p:ph type="sldNum" idx="5"/>
-          </p:nvPr>
-        </p:nvSpPr>
-        <p:spPr/>
-        <p:txBody>
-          <a:bodyPr/>
-          <a:lstStyle/>
-          <a:p>
-            <a:endParaRPr/>
-          </a:p>
-        </p:txBody>
-      </p:sp>
-    </p:spTree>
-  </p:cSld>
-  <p:clrMapOvr>
-    <a:masterClrMapping/>
-  </p:clrMapOvr>
-</p:notes>
-</file>
-
-<file path=ppt/notesSlides/notesSlide18.xml><?xml version="1.0" encoding="utf-8"?>
-<p:notes xmlns:a="http://schemas.openxmlformats.org/drawingml/2006/main" xmlns:r="http://schemas.openxmlformats.org/officeDocument/2006/relationships" xmlns:p="http://schemas.openxmlformats.org/presentationml/2006/main">
-  <p:cSld>
-    <p:spTree>
-      <p:nvGrpSpPr>
-        <p:cNvPr id="1" name=""/>
-        <p:cNvGrpSpPr/>
-        <p:nvPr/>
-      </p:nvGrpSpPr>
-      <p:grpSpPr>
-        <a:xfrm>
-          <a:off x="0" y="0"/>
-          <a:ext cx="0" cy="0"/>
-          <a:chOff x="0" y="0"/>
-          <a:chExt cx="0" cy="0"/>
-        </a:xfrm>
-      </p:grpSpPr>
-      <p:sp>
-        <p:nvSpPr>
-          <p:cNvPr id="2" name="Slide Image Placeholder 1"/>
-          <p:cNvSpPr>
-            <a:spLocks noGrp="1" noRot="1" noChangeAspect="1"/>
-          </p:cNvSpPr>
-          <p:nvPr>
-            <p:ph type="sldImg"/>
-          </p:nvPr>
-        </p:nvSpPr>
-        <p:spPr/>
-      </p:sp>
-      <p:sp>
-        <p:nvSpPr>
-          <p:cNvPr id="3" name="Notes Placeholder 2"/>
-          <p:cNvSpPr>
-            <a:spLocks noGrp="1"/>
-          </p:cNvSpPr>
-          <p:nvPr>
-            <p:ph type="body" idx="1"/>
-          </p:nvPr>
-        </p:nvSpPr>
-        <p:spPr/>
-        <p:txBody>
-          <a:bodyPr/>
-          <a:lstStyle/>
-          <a:p>
-            <a:r>
-              <a:t>움직임을 세 종류로 나눠서 생각하십시오.</a:t>
-            </a:r>
-          </a:p>
-          <a:p>
-            <a:r>
-              <a:t>안정성 별점을 보십시오. 카메라 움직임과 환경 움직임이 별 셋, 인물 동작이 별 둘입니다. 인물이 크게 움직이면 얼굴이 녹아내리거나 손가락이 이상해집니다.</a:t>
-            </a:r>
-          </a:p>
-          <a:p>
-            <a:r>
-              <a:t>그래서 지도 원칙은 이겁니다 — "카메라 움직임 1개 + 피사체 동작 1개"까지만.</a:t>
-            </a:r>
-          </a:p>
-          <a:p>
-            <a:r>
-              <a:t>욕심내서 "인물이 걸어가면서 손을 흔들고 카메라는 회전하고 배경에 비가 온다"라고 쓰면 거의 실패합니다.</a:t>
-            </a:r>
-          </a:p>
-          <a:p>
-            <a:r>
-              <a:t>※ 가장 안전한 조합 — 카메라는 천천히 다가가고, 인물은 눈을 깜빡이거나 옷자락이 흔들리는 정도. 이것만으로도 정지 이미지가 살아납니다.</a:t>
-            </a:r>
-          </a:p>
-          <a:p>
-            <a:endParaRPr/>
-          </a:p>
-          <a:p>
-            <a:r>
-              <a:t>[참고]</a:t>
-            </a:r>
-          </a:p>
-          <a:p>
-            <a:r>
-              <a:t>- https://docs.cloud.google.com/vertex-ai/generative-ai/docs/video/best-practice</a:t>
-            </a:r>
-          </a:p>
-        </p:txBody>
-      </p:sp>
-      <p:sp>
-        <p:nvSpPr>
-          <p:cNvPr id="4" name="Slide Number Placeholder 3"/>
-          <p:cNvSpPr>
-            <a:spLocks noGrp="1"/>
-          </p:cNvSpPr>
-          <p:nvPr>
-            <p:ph type="sldNum" idx="5"/>
-          </p:nvPr>
-        </p:nvSpPr>
-        <p:spPr/>
-        <p:txBody>
-          <a:bodyPr/>
-          <a:lstStyle/>
-          <a:p>
-            <a:endParaRPr/>
-          </a:p>
-        </p:txBody>
-      </p:sp>
-    </p:spTree>
-  </p:cSld>
-  <p:clrMapOvr>
-    <a:masterClrMapping/>
-  </p:clrMapOvr>
-</p:notes>
-</file>
-
-<file path=ppt/notesSlides/notesSlide19.xml><?xml version="1.0" encoding="utf-8"?>
-<p:notes xmlns:a="http://schemas.openxmlformats.org/drawingml/2006/main" xmlns:r="http://schemas.openxmlformats.org/officeDocument/2006/relationships" xmlns:p="http://schemas.openxmlformats.org/presentationml/2006/main">
-  <p:cSld>
-    <p:spTree>
-      <p:nvGrpSpPr>
-        <p:cNvPr id="1" name=""/>
-        <p:cNvGrpSpPr/>
-        <p:nvPr/>
-      </p:nvGrpSpPr>
-      <p:grpSpPr>
-        <a:xfrm>
-          <a:off x="0" y="0"/>
-          <a:ext cx="0" cy="0"/>
-          <a:chOff x="0" y="0"/>
-          <a:chExt cx="0" cy="0"/>
-        </a:xfrm>
-      </p:grpSpPr>
-      <p:sp>
-        <p:nvSpPr>
-          <p:cNvPr id="2" name="Slide Image Placeholder 1"/>
-          <p:cNvSpPr>
-            <a:spLocks noGrp="1" noRot="1" noChangeAspect="1"/>
-          </p:cNvSpPr>
-          <p:nvPr>
-            <p:ph type="sldImg"/>
-          </p:nvPr>
-        </p:nvSpPr>
-        <p:spPr/>
-      </p:sp>
-      <p:sp>
-        <p:nvSpPr>
-          <p:cNvPr id="3" name="Notes Placeholder 2"/>
-          <p:cNvSpPr>
-            <a:spLocks noGrp="1"/>
-          </p:cNvSpPr>
-          <p:nvPr>
-            <p:ph type="body" idx="1"/>
-          </p:nvPr>
-        </p:nvSpPr>
-        <p:spPr/>
-        <p:txBody>
-          <a:bodyPr/>
-          <a:lstStyle/>
-          <a:p>
-            <a:r>
-              <a:t>상황별 템플릿입니다. 그대로 복사해 쓰십시오.</a:t>
-            </a:r>
-          </a:p>
-          <a:p>
-            <a:r>
-              <a:t>가장 아래 것이 오늘 실습에 딱 맞습니다. 카드뉴스 같은 일러스트를 영상으로 바꿀 때 쓰는 프롬프트입니다.</a:t>
-            </a:r>
-          </a:p>
-          <a:p>
-            <a:r>
-              <a:t>"앞쪽 배경과 뒤쪽 배경이 서로 다른 속도로 밀리게" — 이걸 패럴랙스라고 하는데, 정지 그림을 살아 있게 만드는 가장 확실한 방법입니다.</a:t>
-            </a:r>
-          </a:p>
-          <a:p>
-            <a:r>
-              <a:t>맨 마지막 줄을 꼭 넣으십시오. "화면의 한글 문구는 바꾸거나 새로 생성하지 않는다." 이게 없으면 카드뉴스의 글자를 이상하게 다시 그립니다.</a:t>
-            </a:r>
-          </a:p>
-          <a:p>
-            <a:r>
-              <a:t>※ 첫 줄 기본 틀만 외우시면 됩니다. 카메라 → 인물 → 환경 → 소리 순서입니다.</a:t>
-            </a:r>
-          </a:p>
-          <a:p>
-            <a:r>
-              <a:t>[▶ 웹가이드] 「실습 자료실」의 '8초 영상 — 움직임만 지시하기' 카드로 전환해 복사 버튼을 시연합니다.</a:t>
-            </a:r>
-          </a:p>
-          <a:p>
-            <a:endParaRPr/>
-          </a:p>
-          <a:p>
-            <a:r>
-              <a:t>[참고]</a:t>
-            </a:r>
-          </a:p>
-          <a:p>
-            <a:r>
-              <a:t>- https://docs.cloud.google.com/vertex-ai/generative-ai/docs/video/best-practice</a:t>
-            </a:r>
-          </a:p>
-        </p:txBody>
-      </p:sp>
-      <p:sp>
-        <p:nvSpPr>
-          <p:cNvPr id="4" name="Slide Number Placeholder 3"/>
-          <p:cNvSpPr>
-            <a:spLocks noGrp="1"/>
-          </p:cNvSpPr>
-          <p:nvPr>
-            <p:ph type="sldNum" idx="5"/>
-          </p:nvPr>
-        </p:nvSpPr>
-        <p:spPr/>
-        <p:txBody>
-          <a:bodyPr/>
-          <a:lstStyle/>
-          <a:p>
-            <a:endParaRPr/>
-          </a:p>
-        </p:txBody>
-      </p:sp>
-    </p:spTree>
-  </p:cSld>
-  <p:clrMapOvr>
-    <a:masterClrMapping/>
-  </p:clrMapOvr>
-</p:notes>
-</file>
-
-<file path=ppt/notesSlides/notesSlide2.xml><?xml version="1.0" encoding="utf-8"?>
-<p:notes xmlns:a="http://schemas.openxmlformats.org/drawingml/2006/main" xmlns:r="http://schemas.openxmlformats.org/officeDocument/2006/relationships" xmlns:p="http://schemas.openxmlformats.org/presentationml/2006/main">
-  <p:cSld>
-    <p:spTree>
-      <p:nvGrpSpPr>
-        <p:cNvPr id="1" name=""/>
-        <p:cNvGrpSpPr/>
-        <p:nvPr/>
-      </p:nvGrpSpPr>
-      <p:grpSpPr>
-        <a:xfrm>
-          <a:off x="0" y="0"/>
-          <a:ext cx="0" cy="0"/>
-          <a:chOff x="0" y="0"/>
-          <a:chExt cx="0" cy="0"/>
-        </a:xfrm>
-      </p:grpSpPr>
-      <p:sp>
-        <p:nvSpPr>
-          <p:cNvPr id="2" name="Slide Image Placeholder 1"/>
-          <p:cNvSpPr>
-            <a:spLocks noGrp="1" noRot="1" noChangeAspect="1"/>
-          </p:cNvSpPr>
-          <p:nvPr>
-            <p:ph type="sldImg"/>
-          </p:nvPr>
-        </p:nvSpPr>
-        <p:spPr/>
-      </p:sp>
-      <p:sp>
-        <p:nvSpPr>
-          <p:cNvPr id="3" name="Notes Placeholder 2"/>
-          <p:cNvSpPr>
-            <a:spLocks noGrp="1"/>
-          </p:cNvSpPr>
-          <p:nvPr>
-            <p:ph type="body" idx="1"/>
-          </p:nvPr>
-        </p:nvSpPr>
-        <p:spPr/>
-        <p:txBody>
-          <a:bodyPr/>
-          <a:lstStyle/>
-          <a:p>
-            <a:r>
-              <a:t>기본기부터 갑니다. 프롬프트 쓰는 법입니다.</a:t>
-            </a:r>
-          </a:p>
-          <a:p>
-            <a:r>
-              <a:t>많은 분이 "예쁘게 그려 줘"라고 씁니다. 그러면 매번 다른 게 나옵니다. 복불복입니다.</a:t>
-            </a:r>
-          </a:p>
-          <a:p>
-            <a:r>
-              <a:t>오늘 배울 다섯 단계를 쓰면 의도한 그림이 나오고, 고쳐 달라는 지시도 통합니다.</a:t>
-            </a:r>
-          </a:p>
-        </p:txBody>
-      </p:sp>
-      <p:sp>
-        <p:nvSpPr>
-          <p:cNvPr id="4" name="Slide Number Placeholder 3"/>
-          <p:cNvSpPr>
-            <a:spLocks noGrp="1"/>
-          </p:cNvSpPr>
-          <p:nvPr>
-            <p:ph type="sldNum" idx="5"/>
-          </p:nvPr>
-        </p:nvSpPr>
-        <p:spPr/>
-        <p:txBody>
-          <a:bodyPr/>
-          <a:lstStyle/>
-          <a:p>
-            <a:endParaRPr/>
-          </a:p>
-        </p:txBody>
-      </p:sp>
-    </p:spTree>
-  </p:cSld>
-  <p:clrMapOvr>
-    <a:masterClrMapping/>
-  </p:clrMapOvr>
-</p:notes>
-</file>
-
-<file path=ppt/notesSlides/notesSlide20.xml><?xml version="1.0" encoding="utf-8"?>
-<p:notes xmlns:a="http://schemas.openxmlformats.org/drawingml/2006/main" xmlns:r="http://schemas.openxmlformats.org/officeDocument/2006/relationships" xmlns:p="http://schemas.openxmlformats.org/presentationml/2006/main">
-  <p:cSld>
-    <p:spTree>
-      <p:nvGrpSpPr>
-        <p:cNvPr id="1" name=""/>
-        <p:cNvGrpSpPr/>
-        <p:nvPr/>
-      </p:nvGrpSpPr>
-      <p:grpSpPr>
-        <a:xfrm>
-          <a:off x="0" y="0"/>
-          <a:ext cx="0" cy="0"/>
-          <a:chOff x="0" y="0"/>
-          <a:chExt cx="0" cy="0"/>
-        </a:xfrm>
-      </p:grpSpPr>
-      <p:sp>
-        <p:nvSpPr>
-          <p:cNvPr id="2" name="Slide Image Placeholder 1"/>
-          <p:cNvSpPr>
-            <a:spLocks noGrp="1" noRot="1" noChangeAspect="1"/>
-          </p:cNvSpPr>
-          <p:nvPr>
-            <p:ph type="sldImg"/>
-          </p:nvPr>
-        </p:nvSpPr>
-        <p:spPr/>
-      </p:sp>
-      <p:sp>
-        <p:nvSpPr>
-          <p:cNvPr id="3" name="Notes Placeholder 2"/>
-          <p:cNvSpPr>
-            <a:spLocks noGrp="1"/>
-          </p:cNvSpPr>
-          <p:nvPr>
-            <p:ph type="body" idx="1"/>
-          </p:nvPr>
-        </p:nvSpPr>
-        <p:spPr/>
-        <p:txBody>
-          <a:bodyPr/>
-          <a:lstStyle/>
-          <a:p>
-            <a:r>
-              <a:t>마지막 모듈입니다. 만든 것을 밖으로 내보내기 전에 확인할 것들입니다.</a:t>
-            </a:r>
-          </a:p>
-          <a:p>
-            <a:r>
-              <a:t>이 부분을 빼면 현장에서 사고가 납니다. 특히 대외 홍보물이나 학생 대회 지도에서 그렇습니다.</a:t>
-            </a:r>
-          </a:p>
-        </p:txBody>
-      </p:sp>
-      <p:sp>
-        <p:nvSpPr>
-          <p:cNvPr id="4" name="Slide Number Placeholder 3"/>
-          <p:cNvSpPr>
-            <a:spLocks noGrp="1"/>
-          </p:cNvSpPr>
-          <p:nvPr>
-            <p:ph type="sldNum" idx="5"/>
-          </p:nvPr>
-        </p:nvSpPr>
-        <p:spPr/>
-        <p:txBody>
-          <a:bodyPr/>
-          <a:lstStyle/>
-          <a:p>
-            <a:endParaRPr/>
-          </a:p>
-        </p:txBody>
-      </p:sp>
-    </p:spTree>
-  </p:cSld>
-  <p:clrMapOvr>
-    <a:masterClrMapping/>
-  </p:clrMapOvr>
-</p:notes>
-</file>
-
-<file path=ppt/notesSlides/notesSlide21.xml><?xml version="1.0" encoding="utf-8"?>
-<p:notes xmlns:a="http://schemas.openxmlformats.org/drawingml/2006/main" xmlns:r="http://schemas.openxmlformats.org/officeDocument/2006/relationships" xmlns:p="http://schemas.openxmlformats.org/presentationml/2006/main">
-  <p:cSld>
-    <p:spTree>
-      <p:nvGrpSpPr>
-        <p:cNvPr id="1" name=""/>
-        <p:cNvGrpSpPr/>
-        <p:nvPr/>
-      </p:nvGrpSpPr>
-      <p:grpSpPr>
-        <a:xfrm>
-          <a:off x="0" y="0"/>
-          <a:ext cx="0" cy="0"/>
-          <a:chOff x="0" y="0"/>
-          <a:chExt cx="0" cy="0"/>
-        </a:xfrm>
-      </p:grpSpPr>
-      <p:sp>
-        <p:nvSpPr>
-          <p:cNvPr id="2" name="Slide Image Placeholder 1"/>
-          <p:cNvSpPr>
-            <a:spLocks noGrp="1" noRot="1" noChangeAspect="1"/>
-          </p:cNvSpPr>
-          <p:nvPr>
-            <p:ph type="sldImg"/>
-          </p:nvPr>
-        </p:nvSpPr>
-        <p:spPr/>
-      </p:sp>
-      <p:sp>
-        <p:nvSpPr>
-          <p:cNvPr id="3" name="Notes Placeholder 2"/>
-          <p:cNvSpPr>
-            <a:spLocks noGrp="1"/>
-          </p:cNvSpPr>
-          <p:nvPr>
-            <p:ph type="body" idx="1"/>
-          </p:nvPr>
-        </p:nvSpPr>
-        <p:spPr/>
-        <p:txBody>
-          <a:bodyPr/>
-          <a:lstStyle/>
-          <a:p>
-            <a:r>
-              <a:t>여덟 가지입니다. 이 표는 학생 지도를 하실 때 그대로 쓰실 수 있습니다.</a:t>
-            </a:r>
-          </a:p>
-          <a:p>
-            <a:r>
-              <a:t>2번과 3번이 학교 현장에서 제일 자주 걸립니다. Flow는 만 18세 이상, 한국 구글 계정은 만 14세 이상입니다. 초등학생은 교사가 대신 만들어 주는 구조로 설계해야 합니다.</a:t>
-            </a:r>
-          </a:p>
-          <a:p>
-            <a:r>
-              <a:t>6번 워터마크가 홍보물에서 치명적입니다. 무료·중간 요금제로 만든 영상에는 눈에 보이는 워터마크가 박힙니다. 대외 배포용이면 먼저 확인하십시오. 그리고 잘라내라고 지도하시면 안 됩니다.</a:t>
-            </a:r>
-          </a:p>
-          <a:p>
-            <a:r>
-              <a:t>8번이 최근에 바뀐 부분입니다. 교육부가 2025년 12월에 발표한 방침으로, 2026학년도부터 AI 활용 과정을 표기하도록 되어 있습니다. "이건 대회 규정일 뿐 아니라 교육부 공식 방침입니다"라고 말씀하시면 됩니다.</a:t>
-            </a:r>
-          </a:p>
-          <a:p>
-            <a:endParaRPr/>
-          </a:p>
-          <a:p>
-            <a:r>
-              <a:t>[참고]</a:t>
-            </a:r>
-          </a:p>
-          <a:p>
-            <a:r>
-              <a:t>- https://www.moe.go.kr/boardCnts/viewRenew.do?boardID=294&amp;boardSeq=104984&amp;lev=0&amp;m=020402</a:t>
-            </a:r>
-          </a:p>
-        </p:txBody>
-      </p:sp>
-      <p:sp>
-        <p:nvSpPr>
-          <p:cNvPr id="4" name="Slide Number Placeholder 3"/>
-          <p:cNvSpPr>
-            <a:spLocks noGrp="1"/>
-          </p:cNvSpPr>
-          <p:nvPr>
-            <p:ph type="sldNum" idx="5"/>
-          </p:nvPr>
-        </p:nvSpPr>
-        <p:spPr/>
-        <p:txBody>
-          <a:bodyPr/>
-          <a:lstStyle/>
-          <a:p>
-            <a:endParaRPr/>
-          </a:p>
-        </p:txBody>
-      </p:sp>
-    </p:spTree>
-  </p:cSld>
-  <p:clrMapOvr>
-    <a:masterClrMapping/>
-  </p:clrMapOvr>
-</p:notes>
-</file>
-
-<file path=ppt/notesSlides/notesSlide22.xml><?xml version="1.0" encoding="utf-8"?>
-<p:notes xmlns:a="http://schemas.openxmlformats.org/drawingml/2006/main" xmlns:r="http://schemas.openxmlformats.org/officeDocument/2006/relationships" xmlns:p="http://schemas.openxmlformats.org/presentationml/2006/main">
-  <p:cSld>
-    <p:spTree>
-      <p:nvGrpSpPr>
-        <p:cNvPr id="1" name=""/>
-        <p:cNvGrpSpPr/>
-        <p:nvPr/>
-      </p:nvGrpSpPr>
-      <p:grpSpPr>
-        <a:xfrm>
-          <a:off x="0" y="0"/>
-          <a:ext cx="0" cy="0"/>
-          <a:chOff x="0" y="0"/>
-          <a:chExt cx="0" cy="0"/>
-        </a:xfrm>
-      </p:grpSpPr>
-      <p:sp>
-        <p:nvSpPr>
-          <p:cNvPr id="2" name="Slide Image Placeholder 1"/>
-          <p:cNvSpPr>
-            <a:spLocks noGrp="1" noRot="1" noChangeAspect="1"/>
-          </p:cNvSpPr>
-          <p:nvPr>
-            <p:ph type="sldImg"/>
-          </p:nvPr>
-        </p:nvSpPr>
-        <p:spPr/>
-      </p:sp>
-      <p:sp>
-        <p:nvSpPr>
-          <p:cNvPr id="3" name="Notes Placeholder 2"/>
-          <p:cNvSpPr>
-            <a:spLocks noGrp="1"/>
-          </p:cNvSpPr>
-          <p:nvPr>
-            <p:ph type="body" idx="1"/>
-          </p:nvPr>
-        </p:nvSpPr>
-        <p:spPr/>
-        <p:txBody>
-          <a:bodyPr/>
-          <a:lstStyle/>
-          <a:p>
-            <a:r>
-              <a:t>여기서 오해가 많습니다.</a:t>
-            </a:r>
-          </a:p>
-          <a:p>
-            <a:r>
-              <a:t>SynthID는 "AI가 만들었는가"만 알려 줍니다. 누가, 언제, 어느 계정으로 만들었는지는 담겨 있지 않습니다.</a:t>
-            </a:r>
-          </a:p>
-          <a:p>
-            <a:r>
-              <a:t>즉 소유권 증명 수단이 아닙니다. "내가 만들었다"를 증명해 주지 않습니다.</a:t>
-            </a:r>
-          </a:p>
-          <a:p>
-            <a:r>
-              <a:t>그래서 프롬프트 기록이 필요한 겁니다. 대회에서 "내가 한 일"을 입증하는 건 워터마크가 아니라 과정 기록입니다.</a:t>
-            </a:r>
-          </a:p>
-          <a:p>
-            <a:r>
-              <a:t>그리고 마지막 검수 책임은 사람에게 있습니다. 화면 속 오탈자, 사실 관계, 기관 지침 준수 — 이 셋은 AI가 아니라 사람이 마지막에 확인해야 합니다.</a:t>
-            </a:r>
-          </a:p>
-          <a:p>
-            <a:r>
-              <a:t>※ 특히 사실 관계 — AI는 없는 사실을 지어냅니다. 지역 설화나 통계를 다룰 때 특히 조심하십시오.</a:t>
-            </a:r>
-          </a:p>
-        </p:txBody>
-      </p:sp>
-      <p:sp>
-        <p:nvSpPr>
-          <p:cNvPr id="4" name="Slide Number Placeholder 3"/>
-          <p:cNvSpPr>
-            <a:spLocks noGrp="1"/>
-          </p:cNvSpPr>
-          <p:nvPr>
-            <p:ph type="sldNum" idx="5"/>
-          </p:nvPr>
-        </p:nvSpPr>
-        <p:spPr/>
-        <p:txBody>
-          <a:bodyPr/>
-          <a:lstStyle/>
-          <a:p>
-            <a:endParaRPr/>
-          </a:p>
-        </p:txBody>
-      </p:sp>
-    </p:spTree>
-  </p:cSld>
-  <p:clrMapOvr>
-    <a:masterClrMapping/>
-  </p:clrMapOvr>
-</p:notes>
-</file>
-
-<file path=ppt/notesSlides/notesSlide23.xml><?xml version="1.0" encoding="utf-8"?>
-<p:notes xmlns:a="http://schemas.openxmlformats.org/drawingml/2006/main" xmlns:r="http://schemas.openxmlformats.org/officeDocument/2006/relationships" xmlns:p="http://schemas.openxmlformats.org/presentationml/2006/main">
-  <p:cSld>
-    <p:spTree>
-      <p:nvGrpSpPr>
-        <p:cNvPr id="1" name=""/>
-        <p:cNvGrpSpPr/>
-        <p:nvPr/>
-      </p:nvGrpSpPr>
-      <p:grpSpPr>
-        <a:xfrm>
-          <a:off x="0" y="0"/>
-          <a:ext cx="0" cy="0"/>
-          <a:chOff x="0" y="0"/>
-          <a:chExt cx="0" cy="0"/>
-        </a:xfrm>
-      </p:grpSpPr>
-      <p:sp>
-        <p:nvSpPr>
-          <p:cNvPr id="2" name="Slide Image Placeholder 1"/>
-          <p:cNvSpPr>
-            <a:spLocks noGrp="1" noRot="1" noChangeAspect="1"/>
-          </p:cNvSpPr>
-          <p:nvPr>
-            <p:ph type="sldImg"/>
-          </p:nvPr>
-        </p:nvSpPr>
-        <p:spPr/>
-      </p:sp>
-      <p:sp>
-        <p:nvSpPr>
-          <p:cNvPr id="3" name="Notes Placeholder 2"/>
-          <p:cNvSpPr>
-            <a:spLocks noGrp="1"/>
-          </p:cNvSpPr>
-          <p:nvPr>
-            <p:ph type="body" idx="1"/>
-          </p:nvPr>
-        </p:nvSpPr>
-        <p:spPr/>
-        <p:txBody>
-          <a:bodyPr/>
-          <a:lstStyle/>
-          <a:p>
-            <a:r>
-              <a:t>프롬프트 기록 양식입니다. 학생 지도용으로도, 우리 업무 결과물용으로도 그대로 쓰실 수 있습니다.</a:t>
-            </a:r>
-          </a:p>
-          <a:p>
-            <a:r>
-              <a:t>[2]번이 핵심입니다. "내가 정한 것"을 적는 칸입니다. 이게 있어야 "AI가 다 만든 것"이 아니라 "내가 기획하고 AI가 실행한 것"이 됩니다.</a:t>
-            </a:r>
-          </a:p>
-          <a:p>
-            <a:r>
-              <a:t>[4]번도 중요합니다. AI 결과물을 어떻게 고쳤는지 적습니다. 자른 부분, 다시 만든 부분, 얹은 자막.</a:t>
-            </a:r>
-          </a:p>
-          <a:p>
-            <a:r>
-              <a:t>[5]번은 배포 전 최종 점검입니다. 세 칸만 체크하면 됩니다.</a:t>
-            </a:r>
-          </a:p>
-          <a:p>
-            <a:r>
-              <a:t>※ 이 양식은 실습 파일 세트와 실습 가이드 웹페이지에 넣어 두었습니다. 학교에 배포하셔도 됩니다.</a:t>
-            </a:r>
-          </a:p>
-          <a:p>
-            <a:r>
-              <a:t>[▶ 웹가이드] 「자료」 섹션에서 실습 파일 ZIP 안의 기록 양식 위치를 보여 줍니다.</a:t>
-            </a:r>
-          </a:p>
-          <a:p>
-            <a:endParaRPr/>
-          </a:p>
-          <a:p>
-            <a:r>
-              <a:t>[참고]</a:t>
-            </a:r>
-          </a:p>
-          <a:p>
-            <a:r>
-              <a:t>- https://www.moe.go.kr/boardCnts/viewRenew.do?boardID=294&amp;boardSeq=104984&amp;lev=0&amp;m=020402</a:t>
-            </a:r>
-          </a:p>
-        </p:txBody>
-      </p:sp>
-      <p:sp>
-        <p:nvSpPr>
-          <p:cNvPr id="4" name="Slide Number Placeholder 3"/>
-          <p:cNvSpPr>
-            <a:spLocks noGrp="1"/>
-          </p:cNvSpPr>
-          <p:nvPr>
-            <p:ph type="sldNum" idx="5"/>
-          </p:nvPr>
-        </p:nvSpPr>
-        <p:spPr/>
-        <p:txBody>
-          <a:bodyPr/>
-          <a:lstStyle/>
-          <a:p>
-            <a:endParaRPr/>
-          </a:p>
-        </p:txBody>
-      </p:sp>
-    </p:spTree>
-  </p:cSld>
-  <p:clrMapOvr>
-    <a:masterClrMapping/>
-  </p:clrMapOvr>
-</p:notes>
-</file>
-
-<file path=ppt/notesSlides/notesSlide24.xml><?xml version="1.0" encoding="utf-8"?>
-<p:notes xmlns:a="http://schemas.openxmlformats.org/drawingml/2006/main" xmlns:r="http://schemas.openxmlformats.org/officeDocument/2006/relationships" xmlns:p="http://schemas.openxmlformats.org/presentationml/2006/main">
-  <p:cSld>
-    <p:spTree>
-      <p:nvGrpSpPr>
-        <p:cNvPr id="1" name=""/>
-        <p:cNvGrpSpPr/>
-        <p:nvPr/>
-      </p:nvGrpSpPr>
-      <p:grpSpPr>
-        <a:xfrm>
-          <a:off x="0" y="0"/>
-          <a:ext cx="0" cy="0"/>
-          <a:chOff x="0" y="0"/>
-          <a:chExt cx="0" cy="0"/>
-        </a:xfrm>
-      </p:grpSpPr>
-      <p:sp>
-        <p:nvSpPr>
-          <p:cNvPr id="2" name="Slide Image Placeholder 1"/>
-          <p:cNvSpPr>
-            <a:spLocks noGrp="1" noRot="1" noChangeAspect="1"/>
-          </p:cNvSpPr>
-          <p:nvPr>
-            <p:ph type="sldImg"/>
-          </p:nvPr>
-        </p:nvSpPr>
-        <p:spPr/>
-      </p:sp>
-      <p:sp>
-        <p:nvSpPr>
-          <p:cNvPr id="3" name="Notes Placeholder 2"/>
-          <p:cNvSpPr>
-            <a:spLocks noGrp="1"/>
-          </p:cNvSpPr>
-          <p:nvPr>
-            <p:ph type="body" idx="1"/>
-          </p:nvPr>
-        </p:nvSpPr>
-        <p:spPr/>
-        <p:txBody>
-          <a:bodyPr/>
-          <a:lstStyle/>
-          <a:p>
-            <a:r>
-              <a:t>실습 8-B는 '카드뉴스를 움직이게'가 아니라 '짧은 이야기를 만든다'로 바뀌었습니다. 3컷을 30분 안에 다 만드는 것은 물리적으로 어렵습니다 — 컷 ① 하나를 끝까지 통과시키는 것이 목표라고 처음에 못 박아 주십시오. 나머지 두 컷은 같은 절차의 반복이라 사무실에서 이어서 하면 됩니다.</a:t>
-            </a:r>
-          </a:p>
-          <a:p>
-            <a:r>
-              <a:t>성공률이 높은 순서로 설계했습니다 — 컷 ①·③은 사람이 없고, 컷 ②만 캐릭터 한 명입니다. 인물이 4명 이상이거나 여러 개가 동시에 빠르게 움직이는 컷은 거의 실패합니다.</a:t>
-            </a:r>
-          </a:p>
-          <a:p>
-            <a:r>
-              <a:t>8초로 생성하는 이유는 크레딧이 4초와 같은데 앞뒤를 잘라 낼 여유가 생기기 때문입니다. 앞 0.3초·뒤 0.5초 트림 습관 하나로 'AI 티'의 상당 부분이 사라집니다.</a:t>
-            </a:r>
-          </a:p>
-          <a:p>
-            <a:r>
-              <a:t>※ Flow는 한국에서 가시 워터마크가 붙을 수 있습니다. 대외 배포 전에 반드시 내려받은 실물을 눈으로 확인하게 하십시오.</a:t>
-            </a:r>
-          </a:p>
-        </p:txBody>
-      </p:sp>
-      <p:sp>
-        <p:nvSpPr>
-          <p:cNvPr id="4" name="Slide Number Placeholder 3"/>
-          <p:cNvSpPr>
-            <a:spLocks noGrp="1"/>
-          </p:cNvSpPr>
-          <p:nvPr>
-            <p:ph type="sldNum" idx="5"/>
-          </p:nvPr>
-        </p:nvSpPr>
-        <p:spPr/>
-        <p:txBody>
-          <a:bodyPr/>
-          <a:lstStyle/>
-          <a:p>
-            <a:endParaRPr/>
-          </a:p>
-        </p:txBody>
-      </p:sp>
-    </p:spTree>
-  </p:cSld>
-  <p:clrMapOvr>
-    <a:masterClrMapping/>
-  </p:clrMapOvr>
-</p:notes>
-</file>
-
-<file path=ppt/notesSlides/notesSlide25.xml><?xml version="1.0" encoding="utf-8"?>
-<p:notes xmlns:a="http://schemas.openxmlformats.org/drawingml/2006/main" xmlns:r="http://schemas.openxmlformats.org/officeDocument/2006/relationships" xmlns:p="http://schemas.openxmlformats.org/presentationml/2006/main">
-  <p:cSld>
-    <p:spTree>
-      <p:nvGrpSpPr>
-        <p:cNvPr id="1" name=""/>
-        <p:cNvGrpSpPr/>
-        <p:nvPr/>
-      </p:nvGrpSpPr>
-      <p:grpSpPr>
-        <a:xfrm>
-          <a:off x="0" y="0"/>
-          <a:ext cx="0" cy="0"/>
-          <a:chOff x="0" y="0"/>
-          <a:chExt cx="0" cy="0"/>
-        </a:xfrm>
-      </p:grpSpPr>
-      <p:sp>
-        <p:nvSpPr>
-          <p:cNvPr id="2" name="Slide Image Placeholder 1"/>
-          <p:cNvSpPr>
-            <a:spLocks noGrp="1" noRot="1" noChangeAspect="1"/>
-          </p:cNvSpPr>
-          <p:nvPr>
-            <p:ph type="sldImg"/>
-          </p:nvPr>
-        </p:nvSpPr>
-        <p:spPr/>
-      </p:sp>
-      <p:sp>
-        <p:nvSpPr>
-          <p:cNvPr id="3" name="Notes Placeholder 2"/>
-          <p:cNvSpPr>
-            <a:spLocks noGrp="1"/>
-          </p:cNvSpPr>
-          <p:nvPr>
-            <p:ph type="body" idx="1"/>
-          </p:nvPr>
-        </p:nvSpPr>
-        <p:spPr/>
-        <p:txBody>
-          <a:bodyPr/>
-          <a:lstStyle/>
-          <a:p>
-            <a:r>
-              <a:t>3부를 마무리하겠습니다.</a:t>
-            </a:r>
-          </a:p>
-          <a:p>
-            <a:r>
-              <a:t>오늘 배운 것을 한 문장으로 줄이면 — 한 장은 누구나 만들지만, 여덟 장을 같은 화풍으로 만드는 것이 실력이라는 겁니다.</a:t>
-            </a:r>
-          </a:p>
-          <a:p>
-            <a:r>
-              <a:t>그리고 그 실력은 재능이 아니라 규칙에서 나옵니다. 고정 블록을 메모장에 저장하고, 기준 이미지를 만들어 두고, 세 번 고쳐서 안 되면 새로 시작하는 것. 이 셋입니다.</a:t>
-            </a:r>
-          </a:p>
-          <a:p>
-            <a:r>
-              <a:t>마지막으로 한 가지만 당부드리겠습니다. 완벽한 결과물을 만들려고 하지 마십시오. 쓸 수 있는 결과물을 완주하는 것이 먼저입니다.</a:t>
-            </a:r>
-          </a:p>
-          <a:p>
-            <a:r>
-              <a:t>얼굴이 살짝 달라진 것보다 이야기가 지루한 게 훨씬 큰 문제라는 것 — 이 말씀을 기억해 주시면 좋겠습니다. 고맙습니다.</a:t>
-            </a:r>
-          </a:p>
-          <a:p>
-            <a:r>
-              <a:t>[▶ 웹가이드] 마무리로 게시판을 열어 오늘 올라온 카드뉴스와 영상을 함께 봅니다. 서로의 스타일 블록을 구경하는 것이 최고의 복습입니다.</a:t>
-            </a:r>
-          </a:p>
-        </p:txBody>
-      </p:sp>
-      <p:sp>
-        <p:nvSpPr>
-          <p:cNvPr id="4" name="Slide Number Placeholder 3"/>
-          <p:cNvSpPr>
-            <a:spLocks noGrp="1"/>
-          </p:cNvSpPr>
-          <p:nvPr>
-            <p:ph type="sldNum" idx="5"/>
-          </p:nvPr>
-        </p:nvSpPr>
-        <p:spPr/>
-        <p:txBody>
-          <a:bodyPr/>
-          <a:lstStyle/>
-          <a:p>
-            <a:endParaRPr/>
-          </a:p>
-        </p:txBody>
-      </p:sp>
-    </p:spTree>
-  </p:cSld>
-  <p:clrMapOvr>
-    <a:masterClrMapping/>
-  </p:clrMapOvr>
-</p:notes>
-</file>
-
-<file path=ppt/notesSlides/notesSlide3.xml><?xml version="1.0" encoding="utf-8"?>
-<p:notes xmlns:a="http://schemas.openxmlformats.org/drawingml/2006/main" xmlns:r="http://schemas.openxmlformats.org/officeDocument/2006/relationships" xmlns:p="http://schemas.openxmlformats.org/presentationml/2006/main">
-  <p:cSld>
-    <p:spTree>
-      <p:nvGrpSpPr>
-        <p:cNvPr id="1" name=""/>
-        <p:cNvGrpSpPr/>
-        <p:nvPr/>
-      </p:nvGrpSpPr>
-      <p:grpSpPr>
-        <a:xfrm>
-          <a:off x="0" y="0"/>
-          <a:ext cx="0" cy="0"/>
-          <a:chOff x="0" y="0"/>
-          <a:chExt cx="0" cy="0"/>
-        </a:xfrm>
-      </p:grpSpPr>
-      <p:sp>
-        <p:nvSpPr>
-          <p:cNvPr id="2" name="Slide Image Placeholder 1"/>
-          <p:cNvSpPr>
-            <a:spLocks noGrp="1" noRot="1" noChangeAspect="1"/>
-          </p:cNvSpPr>
-          <p:nvPr>
-            <p:ph type="sldImg"/>
-          </p:nvPr>
-        </p:nvSpPr>
-        <p:spPr/>
-      </p:sp>
-      <p:sp>
-        <p:nvSpPr>
-          <p:cNvPr id="3" name="Notes Placeholder 2"/>
-          <p:cNvSpPr>
-            <a:spLocks noGrp="1"/>
-          </p:cNvSpPr>
-          <p:nvPr>
-            <p:ph type="body" idx="1"/>
-          </p:nvPr>
-        </p:nvSpPr>
-        <p:spPr/>
-        <p:txBody>
-          <a:bodyPr/>
-          <a:lstStyle/>
-          <a:p>
-            <a:r>
-              <a:t>다섯 단계입니다. 하나만 기억하신다면 ①번입니다.</a:t>
-            </a:r>
-          </a:p>
-          <a:p>
-            <a:r>
-              <a:t>「이 그림을 어디에 쓸 건지」를 먼저 쓰십시오. "카드뉴스 첫 장으로 쓸 거야", "발표 슬라이드에 넣을 거야" — 이 한마디가 모델의 구도·여백·완성도 기준을 통째로 바꿉니다.</a:t>
-            </a:r>
-          </a:p>
-          <a:p>
-            <a:r>
-              <a:t>용도를 안 쓰면 AI는 '그냥 예쁜 그림'을 만듭니다. 카드뉴스로 쓰려는데 인물이 화면 정중앙을 꽉 채우고 있으면 글자 넣을 자리가 없습니다.</a:t>
-            </a:r>
-          </a:p>
-          <a:p>
-            <a:r>
-              <a:t>④번도 자주 빠뜨립니다. "오른쪽 상단은 글자 공간으로 비워 둘 것" 같은 지시를 넣으면 그대로 쓸 수 있는 그림이 나옵니다.</a:t>
-            </a:r>
-          </a:p>
-          <a:p>
-            <a:r>
-              <a:t>⑤번 제약은 긍정형으로 쓰는 게 요령입니다. 뒤에서 설명드립니다.</a:t>
-            </a:r>
-          </a:p>
-        </p:txBody>
-      </p:sp>
-      <p:sp>
-        <p:nvSpPr>
-          <p:cNvPr id="4" name="Slide Number Placeholder 3"/>
-          <p:cNvSpPr>
-            <a:spLocks noGrp="1"/>
-          </p:cNvSpPr>
-          <p:nvPr>
-            <p:ph type="sldNum" idx="5"/>
-          </p:nvPr>
-        </p:nvSpPr>
-        <p:spPr/>
-        <p:txBody>
-          <a:bodyPr/>
-          <a:lstStyle/>
-          <a:p>
-            <a:endParaRPr/>
-          </a:p>
-        </p:txBody>
-      </p:sp>
-    </p:spTree>
-  </p:cSld>
-  <p:clrMapOvr>
-    <a:masterClrMapping/>
-  </p:clrMapOvr>
-</p:notes>
-</file>
-
-<file path=ppt/notesSlides/notesSlide4.xml><?xml version="1.0" encoding="utf-8"?>
-<p:notes xmlns:a="http://schemas.openxmlformats.org/drawingml/2006/main" xmlns:r="http://schemas.openxmlformats.org/officeDocument/2006/relationships" xmlns:p="http://schemas.openxmlformats.org/presentationml/2006/main">
-  <p:cSld>
-    <p:spTree>
-      <p:nvGrpSpPr>
-        <p:cNvPr id="1" name=""/>
-        <p:cNvGrpSpPr/>
-        <p:nvPr/>
-      </p:nvGrpSpPr>
-      <p:grpSpPr>
-        <a:xfrm>
-          <a:off x="0" y="0"/>
-          <a:ext cx="0" cy="0"/>
-          <a:chOff x="0" y="0"/>
-          <a:chExt cx="0" cy="0"/>
-        </a:xfrm>
-      </p:grpSpPr>
-      <p:sp>
-        <p:nvSpPr>
-          <p:cNvPr id="2" name="Slide Image Placeholder 1"/>
-          <p:cNvSpPr>
-            <a:spLocks noGrp="1" noRot="1" noChangeAspect="1"/>
-          </p:cNvSpPr>
-          <p:nvPr>
-            <p:ph type="sldImg"/>
-          </p:nvPr>
-        </p:nvSpPr>
-        <p:spPr/>
-      </p:sp>
-      <p:sp>
-        <p:nvSpPr>
-          <p:cNvPr id="3" name="Notes Placeholder 2"/>
-          <p:cNvSpPr>
-            <a:spLocks noGrp="1"/>
-          </p:cNvSpPr>
-          <p:nvPr>
-            <p:ph type="body" idx="1"/>
-          </p:nvPr>
-        </p:nvSpPr>
-        <p:spPr/>
-        <p:txBody>
-          <a:bodyPr/>
-          <a:lstStyle/>
-          <a:p>
-            <a:r>
-              <a:t>구글이 공식 문서로 밝힌 네 가지 원칙입니다.</a:t>
-            </a:r>
-          </a:p>
-          <a:p>
-            <a:r>
-              <a:t>두 번째가 실무에서 제일 자주 틀리는 부분입니다. "사람 없이"라고 쓰면 오히려 사람이 나옵니다. 모델은 '없음'을 잘 처리하지 못합니다. "텅 빈 거리"라고 원하는 상태를 쓰십시오.</a:t>
-            </a:r>
-          </a:p>
-          <a:p>
-            <a:r>
-              <a:t>세 번째 — 카메라 용어를 쓰라는 건 영어를 쓰라는 게 아닙니다. "낮은 각도에서 올려다보는", "멀리서 전체가 보이게"처럼 한국어로 쓰셔도 됩니다.</a:t>
-            </a:r>
-          </a:p>
-          <a:p>
-            <a:r>
-              <a:t>다섯 번째가 결과 품질을 크게 올립니다. "옷"이 아니라 "네이비 트위드", "갑옷"이 아니라 "은잎 무늬가 새겨진 판금 갑옷". 재질 이름 하나로 그림이 달라집니다.</a:t>
-            </a:r>
-          </a:p>
-          <a:p>
-            <a:endParaRPr/>
-          </a:p>
-          <a:p>
-            <a:r>
-              <a:t>[참고]</a:t>
-            </a:r>
-          </a:p>
-          <a:p>
-            <a:r>
-              <a:t>- https://cloud.google.com/blog/products/ai-machine-learning/ultimate-prompting-guide-for-nano-banana</a:t>
-            </a:r>
-          </a:p>
-        </p:txBody>
-      </p:sp>
-      <p:sp>
-        <p:nvSpPr>
-          <p:cNvPr id="4" name="Slide Number Placeholder 3"/>
-          <p:cNvSpPr>
-            <a:spLocks noGrp="1"/>
-          </p:cNvSpPr>
-          <p:nvPr>
-            <p:ph type="sldNum" idx="5"/>
-          </p:nvPr>
-        </p:nvSpPr>
-        <p:spPr/>
-        <p:txBody>
-          <a:bodyPr/>
-          <a:lstStyle/>
-          <a:p>
-            <a:endParaRPr/>
-          </a:p>
-        </p:txBody>
-      </p:sp>
-    </p:spTree>
-  </p:cSld>
-  <p:clrMapOvr>
-    <a:masterClrMapping/>
-  </p:clrMapOvr>
-</p:notes>
-</file>
-
-<file path=ppt/notesSlides/notesSlide5.xml><?xml version="1.0" encoding="utf-8"?>
-<p:notes xmlns:a="http://schemas.openxmlformats.org/drawingml/2006/main" xmlns:r="http://schemas.openxmlformats.org/officeDocument/2006/relationships" xmlns:p="http://schemas.openxmlformats.org/presentationml/2006/main">
-  <p:cSld>
-    <p:spTree>
-      <p:nvGrpSpPr>
-        <p:cNvPr id="1" name=""/>
-        <p:cNvGrpSpPr/>
-        <p:nvPr/>
-      </p:nvGrpSpPr>
-      <p:grpSpPr>
-        <a:xfrm>
-          <a:off x="0" y="0"/>
-          <a:ext cx="0" cy="0"/>
-          <a:chOff x="0" y="0"/>
-          <a:chExt cx="0" cy="0"/>
-        </a:xfrm>
-      </p:grpSpPr>
-      <p:sp>
-        <p:nvSpPr>
-          <p:cNvPr id="2" name="Slide Image Placeholder 1"/>
-          <p:cNvSpPr>
-            <a:spLocks noGrp="1" noRot="1" noChangeAspect="1"/>
-          </p:cNvSpPr>
-          <p:nvPr>
-            <p:ph type="sldImg"/>
-          </p:nvPr>
-        </p:nvSpPr>
-        <p:spPr/>
-      </p:sp>
-      <p:sp>
-        <p:nvSpPr>
-          <p:cNvPr id="3" name="Notes Placeholder 2"/>
-          <p:cNvSpPr>
-            <a:spLocks noGrp="1"/>
-          </p:cNvSpPr>
-          <p:nvPr>
-            <p:ph type="body" idx="1"/>
-          </p:nvPr>
-        </p:nvSpPr>
-        <p:spPr/>
-        <p:txBody>
-          <a:bodyPr/>
-          <a:lstStyle/>
-          <a:p>
-            <a:r>
-              <a:t>앞의 5단계와 함께 기억하실 다섯 요소입니다. 스타일·주체·배경·행동·구도.</a:t>
-            </a:r>
-          </a:p>
-          <a:p>
-            <a:r>
-              <a:t>가장 자주 빠뜨리는 것이 '구도'입니다. 이걸 넣으면 카드뉴스로 바로 쓸 수 있는 그림이 나옵니다.</a:t>
-            </a:r>
-          </a:p>
-          <a:p>
-            <a:r>
-              <a:t>그리고 한글 글자를 넣을 때 요령 두 가지 — 넣을 문구를 완성된 한국어로 따옴표 안에 그대로 쓰는 것, 그리고 "3단계 인포그래픽으로"처럼 정보 구조를 지정하는 것입니다.</a:t>
-            </a:r>
-          </a:p>
-          <a:p>
-            <a:endParaRPr/>
-          </a:p>
-          <a:p>
-            <a:r>
-              <a:t>[참고]</a:t>
-            </a:r>
-          </a:p>
-          <a:p>
-            <a:r>
-              <a:t>- assets/infographics/09_이미지프롬프트_5요소_Claude.png</a:t>
-            </a:r>
-          </a:p>
-          <a:p>
-            <a:r>
-              <a:t>- https://support.google.com/gemini/answer/14286560</a:t>
-            </a:r>
-          </a:p>
-        </p:txBody>
-      </p:sp>
-      <p:sp>
-        <p:nvSpPr>
-          <p:cNvPr id="4" name="Slide Number Placeholder 3"/>
-          <p:cNvSpPr>
-            <a:spLocks noGrp="1"/>
-          </p:cNvSpPr>
-          <p:nvPr>
-            <p:ph type="sldNum" idx="5"/>
-          </p:nvPr>
-        </p:nvSpPr>
-        <p:spPr/>
-        <p:txBody>
-          <a:bodyPr/>
-          <a:lstStyle/>
-          <a:p>
-            <a:endParaRPr/>
-          </a:p>
-        </p:txBody>
-      </p:sp>
-    </p:spTree>
-  </p:cSld>
-  <p:clrMapOvr>
-    <a:masterClrMapping/>
-  </p:clrMapOvr>
-</p:notes>
-</file>
-
-<file path=ppt/notesSlides/notesSlide6.xml><?xml version="1.0" encoding="utf-8"?>
-<p:notes xmlns:a="http://schemas.openxmlformats.org/drawingml/2006/main" xmlns:r="http://schemas.openxmlformats.org/officeDocument/2006/relationships" xmlns:p="http://schemas.openxmlformats.org/presentationml/2006/main">
-  <p:cSld>
-    <p:spTree>
-      <p:nvGrpSpPr>
-        <p:cNvPr id="1" name=""/>
-        <p:cNvGrpSpPr/>
-        <p:nvPr/>
-      </p:nvGrpSpPr>
-      <p:grpSpPr>
-        <a:xfrm>
-          <a:off x="0" y="0"/>
-          <a:ext cx="0" cy="0"/>
-          <a:chOff x="0" y="0"/>
-          <a:chExt cx="0" cy="0"/>
-        </a:xfrm>
-      </p:grpSpPr>
-      <p:sp>
-        <p:nvSpPr>
-          <p:cNvPr id="2" name="Slide Image Placeholder 1"/>
-          <p:cNvSpPr>
-            <a:spLocks noGrp="1" noRot="1" noChangeAspect="1"/>
-          </p:cNvSpPr>
-          <p:nvPr>
-            <p:ph type="sldImg"/>
-          </p:nvPr>
-        </p:nvSpPr>
-        <p:spPr/>
-      </p:sp>
-      <p:sp>
-        <p:nvSpPr>
-          <p:cNvPr id="3" name="Notes Placeholder 2"/>
-          <p:cNvSpPr>
-            <a:spLocks noGrp="1"/>
-          </p:cNvSpPr>
-          <p:nvPr>
-            <p:ph type="body" idx="1"/>
-          </p:nvPr>
-        </p:nvSpPr>
-        <p:spPr/>
-        <p:txBody>
-          <a:bodyPr/>
-          <a:lstStyle/>
-          <a:p>
-            <a:r>
-              <a:t>그대로 복사해서 쓰시면 됩니다. 대괄호 안만 각자 사업으로 바꾸십시오.</a:t>
-            </a:r>
-          </a:p>
-          <a:p>
-            <a:r>
-              <a:t>[텍스트] 부분을 주목해 주십시오. "수수춘천이라고 써 줘"가 아니라 따옴표 안에 완성된 문구를 그대로 넣었습니다. 이렇게 해야 글자가 덜 깨집니다.</a:t>
-            </a:r>
-          </a:p>
-          <a:p>
-            <a:r>
-              <a:t>그래도 한글은 자주 깨집니다. 그때는 두 가지 방법이 있습니다.</a:t>
-            </a:r>
-          </a:p>
-          <a:p>
-            <a:r>
-              <a:t>① 생성 후 '더보기 → Redo with Pro'로 다시 만들기</a:t>
-            </a:r>
-          </a:p>
-          <a:p>
-            <a:r>
-              <a:t>② 글자 없이 그림만 만들고 글자는 파워포인트나 캔바에서 얹기</a:t>
-            </a:r>
-          </a:p>
-          <a:p>
-            <a:r>
-              <a:t>실무에서는 ②번이 훨씬 빠르고 확실합니다. 저도 대외 배포물은 대부분 ②로 만듭니다.</a:t>
-            </a:r>
-          </a:p>
-          <a:p>
-            <a:r>
-              <a:t>[▶ 웹가이드] 「이미지·영상」 섹션의 '16:9 인포그래픽 프롬프트' 카드로 전환 — [프롬프트 복사] 버튼을 눌러 제미나이에 붙여 넣고 실제 생성까지 시연합니다. 생성되는 동안 다음 슬라이드로 넘어가면 시간이 비지 않습니다.</a:t>
-            </a:r>
-          </a:p>
-          <a:p>
-            <a:endParaRPr/>
-          </a:p>
-          <a:p>
-            <a:r>
-              <a:t>[참고]</a:t>
-            </a:r>
-          </a:p>
-          <a:p>
-            <a:r>
-              <a:t>- https://support.google.com/gemini/answer/14286560</a:t>
-            </a:r>
-          </a:p>
-        </p:txBody>
-      </p:sp>
-      <p:sp>
-        <p:nvSpPr>
-          <p:cNvPr id="4" name="Slide Number Placeholder 3"/>
-          <p:cNvSpPr>
-            <a:spLocks noGrp="1"/>
-          </p:cNvSpPr>
-          <p:nvPr>
-            <p:ph type="sldNum" idx="5"/>
-          </p:nvPr>
-        </p:nvSpPr>
-        <p:spPr/>
-        <p:txBody>
-          <a:bodyPr/>
-          <a:lstStyle/>
-          <a:p>
-            <a:endParaRPr/>
-          </a:p>
-        </p:txBody>
-      </p:sp>
-    </p:spTree>
-  </p:cSld>
-  <p:clrMapOvr>
-    <a:masterClrMapping/>
-  </p:clrMapOvr>
-</p:notes>
-</file>
-
-<file path=ppt/notesSlides/notesSlide7.xml><?xml version="1.0" encoding="utf-8"?>
-<p:notes xmlns:a="http://schemas.openxmlformats.org/drawingml/2006/main" xmlns:r="http://schemas.openxmlformats.org/officeDocument/2006/relationships" xmlns:p="http://schemas.openxmlformats.org/presentationml/2006/main">
-  <p:cSld>
-    <p:spTree>
-      <p:nvGrpSpPr>
-        <p:cNvPr id="1" name=""/>
-        <p:cNvGrpSpPr/>
-        <p:nvPr/>
-      </p:nvGrpSpPr>
-      <p:grpSpPr>
-        <a:xfrm>
-          <a:off x="0" y="0"/>
-          <a:ext cx="0" cy="0"/>
-          <a:chOff x="0" y="0"/>
-          <a:chExt cx="0" cy="0"/>
-        </a:xfrm>
-      </p:grpSpPr>
-      <p:sp>
-        <p:nvSpPr>
-          <p:cNvPr id="2" name="Slide Image Placeholder 1"/>
-          <p:cNvSpPr>
-            <a:spLocks noGrp="1" noRot="1" noChangeAspect="1"/>
-          </p:cNvSpPr>
-          <p:nvPr>
-            <p:ph type="sldImg"/>
-          </p:nvPr>
-        </p:nvSpPr>
-        <p:spPr/>
-      </p:sp>
-      <p:sp>
-        <p:nvSpPr>
-          <p:cNvPr id="3" name="Notes Placeholder 2"/>
-          <p:cNvSpPr>
-            <a:spLocks noGrp="1"/>
-          </p:cNvSpPr>
-          <p:nvPr>
-            <p:ph type="body" idx="1"/>
-          </p:nvPr>
-        </p:nvSpPr>
-        <p:spPr/>
-        <p:txBody>
-          <a:bodyPr/>
-          <a:lstStyle/>
-          <a:p>
-            <a:r>
-              <a:t>여기부터가 3부의 본론입니다.</a:t>
-            </a:r>
-          </a:p>
-          <a:p>
-            <a:r>
-              <a:t>한 장 만드는 건 쉽습니다. 문제는 두 번째, 세 번째 장입니다. 그림체가 달라지고 인물 얼굴이 달라집니다.</a:t>
-            </a:r>
-          </a:p>
-          <a:p>
-            <a:r>
-              <a:t>해결책은 딱 한 문장으로 정리됩니다 — 그림체와 인물 서술은 한 글자도 안 바꾸고 복사하고, 배경·행동·구도만 갈아끼운다.</a:t>
-            </a:r>
-          </a:p>
-        </p:txBody>
-      </p:sp>
-      <p:sp>
-        <p:nvSpPr>
-          <p:cNvPr id="4" name="Slide Number Placeholder 3"/>
-          <p:cNvSpPr>
-            <a:spLocks noGrp="1"/>
-          </p:cNvSpPr>
-          <p:nvPr>
-            <p:ph type="sldNum" idx="5"/>
-          </p:nvPr>
-        </p:nvSpPr>
-        <p:spPr/>
-        <p:txBody>
-          <a:bodyPr/>
-          <a:lstStyle/>
-          <a:p>
-            <a:endParaRPr/>
-          </a:p>
-        </p:txBody>
-      </p:sp>
-    </p:spTree>
-  </p:cSld>
-  <p:clrMapOvr>
-    <a:masterClrMapping/>
-  </p:clrMapOvr>
-</p:notes>
-</file>
-
-<file path=ppt/notesSlides/notesSlide8.xml><?xml version="1.0" encoding="utf-8"?>
-<p:notes xmlns:a="http://schemas.openxmlformats.org/drawingml/2006/main" xmlns:r="http://schemas.openxmlformats.org/officeDocument/2006/relationships" xmlns:p="http://schemas.openxmlformats.org/presentationml/2006/main">
-  <p:cSld>
-    <p:spTree>
-      <p:nvGrpSpPr>
-        <p:cNvPr id="1" name=""/>
-        <p:cNvGrpSpPr/>
-        <p:nvPr/>
-      </p:nvGrpSpPr>
-      <p:grpSpPr>
-        <a:xfrm>
-          <a:off x="0" y="0"/>
-          <a:ext cx="0" cy="0"/>
-          <a:chOff x="0" y="0"/>
-          <a:chExt cx="0" cy="0"/>
-        </a:xfrm>
-      </p:grpSpPr>
-      <p:sp>
-        <p:nvSpPr>
-          <p:cNvPr id="2" name="Slide Image Placeholder 1"/>
-          <p:cNvSpPr>
-            <a:spLocks noGrp="1" noRot="1" noChangeAspect="1"/>
-          </p:cNvSpPr>
-          <p:nvPr>
-            <p:ph type="sldImg"/>
-          </p:nvPr>
-        </p:nvSpPr>
-        <p:spPr/>
-      </p:sp>
-      <p:sp>
-        <p:nvSpPr>
-          <p:cNvPr id="3" name="Notes Placeholder 2"/>
-          <p:cNvSpPr>
-            <a:spLocks noGrp="1"/>
-          </p:cNvSpPr>
-          <p:nvPr>
-            <p:ph type="body" idx="1"/>
-          </p:nvPr>
-        </p:nvSpPr>
-        <p:spPr/>
-        <p:txBody>
-          <a:bodyPr/>
-          <a:lstStyle/>
-          <a:p>
-            <a:r>
-              <a:t>구글 공식 가이드가 프롬프트를 다섯 축으로 나눕니다. 그림체·인물·배경·행동·구도.</a:t>
-            </a:r>
-          </a:p>
-          <a:p>
-            <a:r>
-              <a:t>일관성 작업에서는 앞의 두 개를 고정하고 뒤의 세 개만 바꿉니다. 이게 전부입니다.</a:t>
-            </a:r>
-          </a:p>
-          <a:p>
-            <a:r>
-              <a:t>여기서 헷갈리기 쉬운 게 있습니다. Subject는 '주제'가 아니라 '누가·무엇이 나오는가', 즉 인물·피사체입니다.</a:t>
-            </a:r>
-          </a:p>
-          <a:p>
-            <a:r>
-              <a:t>주인공은 여덟 컷 내내 같은 사람이므로 생김새·옷 서술을 한 글자도 바꾸지 않고 복사합니다. 컷마다 달라지는 건 그 인물이 어디서, 무엇을 하며, 어떻게 잡히는가입니다.</a:t>
-            </a:r>
-          </a:p>
-          <a:p>
-            <a:r>
-              <a:t>※ 실무 요령 — 고정 블록을 메모장에 저장해 두고 매 컷 복사하십시오. 기억에 의존하면 반드시 달라집니다.</a:t>
-            </a:r>
-          </a:p>
-        </p:txBody>
-      </p:sp>
-      <p:sp>
-        <p:nvSpPr>
-          <p:cNvPr id="4" name="Slide Number Placeholder 3"/>
-          <p:cNvSpPr>
-            <a:spLocks noGrp="1"/>
-          </p:cNvSpPr>
-          <p:nvPr>
-            <p:ph type="sldNum" idx="5"/>
-          </p:nvPr>
-        </p:nvSpPr>
-        <p:spPr/>
-        <p:txBody>
-          <a:bodyPr/>
-          <a:lstStyle/>
-          <a:p>
-            <a:endParaRPr/>
-          </a:p>
-        </p:txBody>
-      </p:sp>
-    </p:spTree>
-  </p:cSld>
-  <p:clrMapOvr>
-    <a:masterClrMapping/>
-  </p:clrMapOvr>
-</p:notes>
-</file>
-
-<file path=ppt/notesSlides/notesSlide9.xml><?xml version="1.0" encoding="utf-8"?>
-<p:notes xmlns:a="http://schemas.openxmlformats.org/drawingml/2006/main" xmlns:r="http://schemas.openxmlformats.org/officeDocument/2006/relationships" xmlns:p="http://schemas.openxmlformats.org/presentationml/2006/main">
-  <p:cSld>
-    <p:spTree>
-      <p:nvGrpSpPr>
-        <p:cNvPr id="1" name=""/>
-        <p:cNvGrpSpPr/>
-        <p:nvPr/>
-      </p:nvGrpSpPr>
-      <p:grpSpPr>
-        <a:xfrm>
-          <a:off x="0" y="0"/>
-          <a:ext cx="0" cy="0"/>
-          <a:chOff x="0" y="0"/>
-          <a:chExt cx="0" cy="0"/>
-        </a:xfrm>
-      </p:grpSpPr>
-      <p:sp>
-        <p:nvSpPr>
-          <p:cNvPr id="2" name="Slide Image Placeholder 1"/>
-          <p:cNvSpPr>
-            <a:spLocks noGrp="1" noRot="1" noChangeAspect="1"/>
-          </p:cNvSpPr>
-          <p:nvPr>
-            <p:ph type="sldImg"/>
-          </p:nvPr>
-        </p:nvSpPr>
-        <p:spPr/>
-      </p:sp>
-      <p:sp>
-        <p:nvSpPr>
-          <p:cNvPr id="3" name="Notes Placeholder 2"/>
-          <p:cNvSpPr>
-            <a:spLocks noGrp="1"/>
-          </p:cNvSpPr>
-          <p:nvPr>
-            <p:ph type="body" idx="1"/>
-          </p:nvPr>
-        </p:nvSpPr>
-        <p:spPr/>
-        <p:txBody>
-          <a:bodyPr/>
-          <a:lstStyle/>
-          <a:p>
-            <a:r>
-              <a:t>이게 오늘 만들 가장 중요한 파일입니다. 파일이라고 해 봐야 메모장 한 장입니다.</a:t>
-            </a:r>
-          </a:p>
-          <a:p>
-            <a:r>
-              <a:t>네 줄로 되어 있습니다 — 그림체, 색과 빛, 질감, 화면.</a:t>
-            </a:r>
-          </a:p>
-          <a:p>
-            <a:r>
-              <a:t>'색·빛' 줄에서 "빛은 화면 왼쪽 위에서"라는 구절을 주목해 주십시오. 조명 방향 한 줄이 컷 사이 색 튐을 크게 줄입니다. 이걸 안 쓰면 어떤 컷은 밝고 어떤 컷은 어둡습니다.</a:t>
-            </a:r>
-          </a:p>
-          <a:p>
-            <a:r>
-              <a:t>'최대 6색'도 실전 요령입니다. 색 수를 제한하면 여러 장이 훨씬 잘 어울립니다.</a:t>
-            </a:r>
-          </a:p>
-          <a:p>
-            <a:r>
-              <a:t>※ 실습 순서 — 스타일 블록을 먼저 정하고, 그다음 첫 장을 만드십시오. 반대로 하면 세 장이 다 다른 그림이 됩니다.</a:t>
-            </a:r>
-          </a:p>
-        </p:txBody>
-      </p:sp>
-      <p:sp>
-        <p:nvSpPr>
-          <p:cNvPr id="4" name="Slide Number Placeholder 3"/>
-          <p:cNvSpPr>
-            <a:spLocks noGrp="1"/>
-          </p:cNvSpPr>
-          <p:nvPr>
-            <p:ph type="sldNum" idx="5"/>
-          </p:nvPr>
-        </p:nvSpPr>
-        <p:spPr/>
-        <p:txBody>
-          <a:bodyPr/>
-          <a:lstStyle/>
-          <a:p>
-            <a:endParaRPr/>
-          </a:p>
-        </p:txBody>
-      </p:sp>
-    </p:spTree>
-  </p:cSld>
-  <p:clrMapOvr>
-    <a:masterClrMapping/>
-  </p:clrMapOvr>
-</p:notes>
 </file>
 
 <file path=ppt/slideLayouts/slideLayout1.xml><?xml version="1.0" encoding="utf-8"?>
@@ -21448,17 +18602,6 @@
               <a:ea typeface="Consolas"/>
               <a:cs typeface="Consolas"/>
             </a:endParaRPr>
-            <a:r>
-              <a:rPr sz="1200" b="0" i="0">
-                <a:solidFill>
-                  <a:srgbClr val="FAF9F5"/>
-                </a:solidFill>
-                <a:latin typeface="Consolas"/>
-                <a:ea typeface="Consolas"/>
-                <a:cs typeface="Consolas"/>
-              </a:rPr>
-              <a:t>→ 이 한 문장에서 컷 3개와 자막 3줄이 그대로 나옵니다.</a:t>
-            </a:r>
           </a:p>
           <a:p>
             <a:pPr algn="l">
@@ -21475,127 +18618,6 @@
                 <a:cs typeface="Consolas"/>
               </a:defRPr>
             </a:pPr>
-            <a:r>
-              <a:rPr sz="1200" b="0" i="0">
-                <a:solidFill>
-                  <a:srgbClr val="FAF9F5"/>
-                </a:solidFill>
-                <a:latin typeface="Consolas"/>
-                <a:ea typeface="Consolas"/>
-                <a:cs typeface="Consolas"/>
-              </a:rPr>
-              <a:t/>
-            </a:r>
-          </a:p>
-          <a:p>
-            <a:pPr algn="l">
-              <a:lnSpc>
-                <a:spcPct val="118000"/>
-              </a:lnSpc>
-              <a:buNone/>
-              <a:defRPr sz="1200" b="0" i="0">
-                <a:solidFill>
-                  <a:srgbClr val="FAF9F5"/>
-                </a:solidFill>
-                <a:latin typeface="Consolas"/>
-                <a:ea typeface="Consolas"/>
-                <a:cs typeface="Consolas"/>
-              </a:defRPr>
-            </a:pPr>
-            <a:r>
-              <a:rPr sz="1200" b="0" i="0">
-                <a:solidFill>
-                  <a:srgbClr val="FAF9F5"/>
-                </a:solidFill>
-                <a:latin typeface="Consolas"/>
-                <a:ea typeface="Consolas"/>
-                <a:cs typeface="Consolas"/>
-              </a:rPr>
-              <a:t>━━━ 2단계 · 캐릭터 기준 이미지 — 앞 장의 후보 6그리드 방식 ━━━</a:t>
-            </a:r>
-          </a:p>
-          <a:p>
-            <a:pPr algn="l">
-              <a:lnSpc>
-                <a:spcPct val="118000"/>
-              </a:lnSpc>
-              <a:buNone/>
-              <a:defRPr sz="1200" b="0" i="0">
-                <a:solidFill>
-                  <a:srgbClr val="FAF9F5"/>
-                </a:solidFill>
-                <a:latin typeface="Consolas"/>
-                <a:ea typeface="Consolas"/>
-                <a:cs typeface="Consolas"/>
-              </a:defRPr>
-            </a:pPr>
-            <a:r>
-              <a:rPr sz="1200" b="0" i="0">
-                <a:solidFill>
-                  <a:srgbClr val="FAF9F5"/>
-                </a:solidFill>
-                <a:latin typeface="Consolas"/>
-                <a:ea typeface="Consolas"/>
-                <a:cs typeface="Consolas"/>
-              </a:rPr>
-              <a:t>확정한 1장을 '캐릭터기준_◯◯.png' 로 저장하고, 컷마다 다시 첨부합니다.</a:t>
-            </a:r>
-          </a:p>
-          <a:p>
-            <a:pPr algn="l">
-              <a:lnSpc>
-                <a:spcPct val="118000"/>
-              </a:lnSpc>
-              <a:buNone/>
-              <a:defRPr sz="1200" b="0" i="0">
-                <a:solidFill>
-                  <a:srgbClr val="FAF9F5"/>
-                </a:solidFill>
-                <a:latin typeface="Consolas"/>
-                <a:ea typeface="Consolas"/>
-                <a:cs typeface="Consolas"/>
-              </a:defRPr>
-            </a:pPr>
-            <a:r>
-              <a:rPr sz="1200" b="0" i="0">
-                <a:solidFill>
-                  <a:srgbClr val="FAF9F5"/>
-                </a:solidFill>
-                <a:latin typeface="Consolas"/>
-                <a:ea typeface="Consolas"/>
-                <a:cs typeface="Consolas"/>
-              </a:rPr>
-              <a:t/>
-            </a:r>
-          </a:p>
-          <a:p>
-            <a:pPr algn="l">
-              <a:lnSpc>
-                <a:spcPct val="118000"/>
-              </a:lnSpc>
-              <a:buNone/>
-              <a:defRPr sz="1200" b="0" i="0">
-                <a:solidFill>
-                  <a:srgbClr val="FAF9F5"/>
-                </a:solidFill>
-                <a:latin typeface="Consolas"/>
-                <a:ea typeface="Consolas"/>
-                <a:cs typeface="Consolas"/>
-              </a:defRPr>
-            </a:pPr>
-            <a:r>
-              <a:rPr sz="1200" b="0" i="0">
-                <a:solidFill>
-                  <a:srgbClr val="FAF9F5"/>
-                </a:solidFill>
-                <a:latin typeface="Consolas"/>
-                <a:ea typeface="Consolas"/>
-                <a:cs typeface="Consolas"/>
-              </a:rPr>
-              <a:t>━━━ 3단계 · 컷 키프레임 — 컷마다 이 틀만 갈아끼운다 ━━━</a:t>
-            </a:r>
-          </a:p>
-          <a:p>
             <a:endParaRPr sz="1200" b="0" i="0">
               <a:solidFill>
                 <a:srgbClr val="FAF9F5"/>
@@ -21604,6 +18626,22 @@
               <a:ea typeface="Consolas"/>
               <a:cs typeface="Consolas"/>
             </a:endParaRPr>
+          </a:p>
+          <a:p>
+            <a:pPr algn="l">
+              <a:lnSpc>
+                <a:spcPct val="118000"/>
+              </a:lnSpc>
+              <a:buNone/>
+              <a:defRPr sz="1200" b="0" i="0">
+                <a:solidFill>
+                  <a:srgbClr val="FAF9F5"/>
+                </a:solidFill>
+                <a:latin typeface="Consolas"/>
+                <a:ea typeface="Consolas"/>
+                <a:cs typeface="Consolas"/>
+              </a:defRPr>
+            </a:pPr>
             <a:r>
               <a:rPr sz="1200" b="0" i="0">
                 <a:solidFill>
@@ -21613,7 +18651,7 @@
                 <a:ea typeface="Consolas"/>
                 <a:cs typeface="Consolas"/>
               </a:rPr>
-              <a:t>[1번 이미지] = 그림체 기준     [2번 이미지] = ◯◯의 캐릭터 기준</a:t>
+              <a:t>━━━ 2단계 · 캐릭터 기준 이미지 — 앞 장의 후보 6그리드 방식 ━━━</a:t>
             </a:r>
           </a:p>
           <a:p>
@@ -21640,7 +18678,7 @@
                 <a:ea typeface="Consolas"/>
                 <a:cs typeface="Consolas"/>
               </a:rPr>
-              <a:t>컷 1 / [화면 크기], [카메라 각도].</a:t>
+              <a:t>확정한 1장을 '캐릭터기준_◯◯.png' 로 저장하고, 컷마다 다시 첨부합니다.</a:t>
             </a:r>
           </a:p>
           <a:p>
@@ -21658,73 +18696,6 @@
                 <a:cs typeface="Consolas"/>
               </a:defRPr>
             </a:pPr>
-            <a:r>
-              <a:rPr sz="1200" b="0" i="0">
-                <a:solidFill>
-                  <a:srgbClr val="FAF9F5"/>
-                </a:solidFill>
-                <a:latin typeface="Consolas"/>
-                <a:ea typeface="Consolas"/>
-                <a:cs typeface="Consolas"/>
-              </a:rPr>
-              <a:t>[장소·시간·날씨]. [인물이 하는 단순한 동작 하나].</a:t>
-            </a:r>
-          </a:p>
-          <a:p>
-            <a:pPr algn="l">
-              <a:lnSpc>
-                <a:spcPct val="118000"/>
-              </a:lnSpc>
-              <a:buNone/>
-              <a:defRPr sz="1200" b="0" i="0">
-                <a:solidFill>
-                  <a:srgbClr val="FAF9F5"/>
-                </a:solidFill>
-                <a:latin typeface="Consolas"/>
-                <a:ea typeface="Consolas"/>
-                <a:cs typeface="Consolas"/>
-              </a:defRPr>
-            </a:pPr>
-            <a:r>
-              <a:rPr sz="1200" b="0" i="0">
-                <a:solidFill>
-                  <a:srgbClr val="FAF9F5"/>
-                </a:solidFill>
-                <a:latin typeface="Consolas"/>
-                <a:ea typeface="Consolas"/>
-                <a:cs typeface="Consolas"/>
-              </a:rPr>
-              <a:t>인물은 캐릭터 기준 이미지와 똑같이 유지해줘.</a:t>
-            </a:r>
-          </a:p>
-          <a:p>
-            <a:pPr algn="l">
-              <a:lnSpc>
-                <a:spcPct val="118000"/>
-              </a:lnSpc>
-              <a:buNone/>
-              <a:defRPr sz="1200" b="0" i="0">
-                <a:solidFill>
-                  <a:srgbClr val="FAF9F5"/>
-                </a:solidFill>
-                <a:latin typeface="Consolas"/>
-                <a:ea typeface="Consolas"/>
-                <a:cs typeface="Consolas"/>
-              </a:defRPr>
-            </a:pPr>
-            <a:r>
-              <a:rPr sz="1200" b="0" i="0">
-                <a:solidFill>
-                  <a:srgbClr val="FAF9F5"/>
-                </a:solidFill>
-                <a:latin typeface="Consolas"/>
-                <a:ea typeface="Consolas"/>
-                <a:cs typeface="Consolas"/>
-              </a:rPr>
-              <a:t>그림체는 [1번 이미지]를 그대로 따라줘. 16:9.</a:t>
-            </a:r>
-          </a:p>
-          <a:p>
             <a:endParaRPr sz="1200" b="0" i="0">
               <a:solidFill>
                 <a:srgbClr val="FAF9F5"/>
@@ -21758,6 +18729,161 @@
                 <a:ea typeface="Consolas"/>
                 <a:cs typeface="Consolas"/>
               </a:rPr>
+              <a:t>━━━ 3단계 · 컷 키프레임 — 컷마다 이 틀만 갈아끼운다 ━━━</a:t>
+            </a:r>
+          </a:p>
+          <a:p>
+            <a:endParaRPr sz="1200" b="0" i="0">
+              <a:solidFill>
+                <a:srgbClr val="FAF9F5"/>
+              </a:solidFill>
+              <a:latin typeface="Consolas"/>
+              <a:ea typeface="Consolas"/>
+              <a:cs typeface="Consolas"/>
+            </a:endParaRPr>
+          </a:p>
+          <a:p>
+            <a:pPr algn="l">
+              <a:lnSpc>
+                <a:spcPct val="118000"/>
+              </a:lnSpc>
+              <a:buNone/>
+              <a:defRPr sz="1200" b="0" i="0">
+                <a:solidFill>
+                  <a:srgbClr val="FAF9F5"/>
+                </a:solidFill>
+                <a:latin typeface="Consolas"/>
+                <a:ea typeface="Consolas"/>
+                <a:cs typeface="Consolas"/>
+              </a:defRPr>
+            </a:pPr>
+            <a:r>
+              <a:rPr sz="1200" b="0" i="0">
+                <a:solidFill>
+                  <a:srgbClr val="FAF9F5"/>
+                </a:solidFill>
+                <a:latin typeface="Consolas"/>
+                <a:ea typeface="Consolas"/>
+                <a:cs typeface="Consolas"/>
+              </a:rPr>
+              <a:t>컷 1 / [화면 크기], [카메라 각도].</a:t>
+            </a:r>
+          </a:p>
+          <a:p>
+            <a:pPr algn="l">
+              <a:lnSpc>
+                <a:spcPct val="118000"/>
+              </a:lnSpc>
+              <a:buNone/>
+              <a:defRPr sz="1200" b="0" i="0">
+                <a:solidFill>
+                  <a:srgbClr val="FAF9F5"/>
+                </a:solidFill>
+                <a:latin typeface="Consolas"/>
+                <a:ea typeface="Consolas"/>
+                <a:cs typeface="Consolas"/>
+              </a:defRPr>
+            </a:pPr>
+            <a:r>
+              <a:rPr sz="1200" b="0" i="0">
+                <a:solidFill>
+                  <a:srgbClr val="FAF9F5"/>
+                </a:solidFill>
+                <a:latin typeface="Consolas"/>
+                <a:ea typeface="Consolas"/>
+                <a:cs typeface="Consolas"/>
+              </a:rPr>
+              <a:t>[장소·시간·날씨]. [인물이 하는 단순한 동작 하나].</a:t>
+            </a:r>
+          </a:p>
+          <a:p>
+            <a:pPr algn="l">
+              <a:lnSpc>
+                <a:spcPct val="118000"/>
+              </a:lnSpc>
+              <a:buNone/>
+              <a:defRPr sz="1200" b="0" i="0">
+                <a:solidFill>
+                  <a:srgbClr val="FAF9F5"/>
+                </a:solidFill>
+                <a:latin typeface="Consolas"/>
+                <a:ea typeface="Consolas"/>
+                <a:cs typeface="Consolas"/>
+              </a:defRPr>
+            </a:pPr>
+            <a:r>
+              <a:rPr sz="1200" b="0" i="0">
+                <a:solidFill>
+                  <a:srgbClr val="FAF9F5"/>
+                </a:solidFill>
+                <a:latin typeface="Consolas"/>
+                <a:ea typeface="Consolas"/>
+                <a:cs typeface="Consolas"/>
+              </a:rPr>
+              <a:t>인물은 캐릭터 기준 이미지와 똑같이 유지해줘.</a:t>
+            </a:r>
+          </a:p>
+          <a:p>
+            <a:pPr algn="l">
+              <a:lnSpc>
+                <a:spcPct val="118000"/>
+              </a:lnSpc>
+              <a:buNone/>
+              <a:defRPr sz="1200" b="0" i="0">
+                <a:solidFill>
+                  <a:srgbClr val="FAF9F5"/>
+                </a:solidFill>
+                <a:latin typeface="Consolas"/>
+                <a:ea typeface="Consolas"/>
+                <a:cs typeface="Consolas"/>
+              </a:defRPr>
+            </a:pPr>
+            <a:r>
+              <a:rPr sz="1200" b="0" i="0">
+                <a:solidFill>
+                  <a:srgbClr val="FAF9F5"/>
+                </a:solidFill>
+                <a:latin typeface="Consolas"/>
+                <a:ea typeface="Consolas"/>
+                <a:cs typeface="Consolas"/>
+              </a:rPr>
+              <a:t>그림체는 [1번 이미지]를 그대로 따라줘. 16:9.</a:t>
+            </a:r>
+          </a:p>
+          <a:p>
+            <a:endParaRPr sz="1200" b="0" i="0">
+              <a:solidFill>
+                <a:srgbClr val="FAF9F5"/>
+              </a:solidFill>
+              <a:latin typeface="Consolas"/>
+              <a:ea typeface="Consolas"/>
+              <a:cs typeface="Consolas"/>
+            </a:endParaRPr>
+          </a:p>
+          <a:p>
+            <a:pPr algn="l">
+              <a:lnSpc>
+                <a:spcPct val="118000"/>
+              </a:lnSpc>
+              <a:buNone/>
+              <a:defRPr sz="1200" b="0" i="0">
+                <a:solidFill>
+                  <a:srgbClr val="FAF9F5"/>
+                </a:solidFill>
+                <a:latin typeface="Consolas"/>
+                <a:ea typeface="Consolas"/>
+                <a:cs typeface="Consolas"/>
+              </a:defRPr>
+            </a:pPr>
+            <a:r>
+              <a:rPr sz="1200" b="0" i="0">
+                <a:solidFill>
+                  <a:srgbClr val="FAF9F5"/>
+                </a:solidFill>
+                <a:latin typeface="Consolas"/>
+                <a:ea typeface="Consolas"/>
+                <a:cs typeface="Consolas"/>
+              </a:rPr>
               <a:t>━━━ 4단계 · 영상화 — 움직임만 쓴다 ━━━</a:t>
             </a:r>
           </a:p>
@@ -21884,17 +19010,14 @@
                 <a:cs typeface="Consolas"/>
               </a:defRPr>
             </a:pPr>
-            <a:r>
-              <a:rPr sz="1200" b="0" i="0">
-                <a:solidFill>
-                  <a:srgbClr val="FAF9F5"/>
-                </a:solidFill>
-                <a:latin typeface="Consolas"/>
-                <a:ea typeface="Consolas"/>
-                <a:cs typeface="Consolas"/>
-              </a:rPr>
-              <a:t/>
-            </a:r>
+            <a:endParaRPr sz="1200" b="0" i="0">
+              <a:solidFill>
+                <a:srgbClr val="FAF9F5"/>
+              </a:solidFill>
+              <a:latin typeface="Consolas"/>
+              <a:ea typeface="Consolas"/>
+              <a:cs typeface="Consolas"/>
+            </a:endParaRPr>
           </a:p>
         </p:txBody>
       </p:sp>
